--- a/food-ppt/examples/experimental-design-demo.pptx
+++ b/food-ppt/examples/experimental-design-demo.pptx
@@ -12,6 +12,8 @@
     <p:sldId id="260" r:id="rId12"/>
     <p:sldId id="261" r:id="rId13"/>
     <p:sldId id="262" r:id="rId14"/>
+    <p:sldId id="263" r:id="rId15"/>
+    <p:sldId id="264" r:id="rId16"/>
   </p:sldIdLst>
   <p:sldSz cx="12191695" cy="6858000" type="screen4x3"/>
   <p:notesSz cx="6858000" cy="9144000"/>
@@ -578,7 +580,7 @@
           <a:lstStyle/>
           <a:p>
             <a:r>
-              <a:t>Orient the audience with the design before results.</a:t>
+              <a:t>A 'cards' slide (accent-bar metric cards) gives the audience the design's key parameters at a glance before the detailed flow. Synthetic numbers.</a:t>
             </a:r>
           </a:p>
         </p:txBody>
@@ -648,7 +650,7 @@
           <a:lstStyle/>
           <a:p>
             <a:r>
-              <a:t>Rendered as native PowerPoint shapes — every box and arrow is individually movable and editable. Built from food-figure's experimental-flow blueprint, theme-matched. Synthetic design for demonstration.</a:t>
+              <a:t>Orient the audience with the design before results.</a:t>
             </a:r>
           </a:p>
         </p:txBody>
@@ -718,7 +720,7 @@
           <a:lstStyle/>
           <a:p>
             <a:r>
-              <a:t>A result slide with a scientific-style native table plus a Key findings panel. Numbers are synthetic placeholders.</a:t>
+              <a:t>Rendered as native PowerPoint shapes — every box and arrow is individually movable and editable. Built from food-figure's experimental-flow blueprint, theme-matched. Synthetic design for demonstration.</a:t>
             </a:r>
           </a:p>
         </p:txBody>
@@ -788,7 +790,7 @@
           <a:lstStyle/>
           <a:p>
             <a:r>
-              <a:t>When a figure isn't supplied the builder shows a placeholder; in normal use figure_placer supplies a theme-matched food-figure plot. Synthetic result.</a:t>
+              <a:t>A result slide with a scientific-style native table plus a Key findings panel. Numbers are synthetic placeholders.</a:t>
             </a:r>
           </a:p>
         </p:txBody>
@@ -858,7 +860,7 @@
           <a:lstStyle/>
           <a:p>
             <a:r>
-              <a:t>Required closing summary: headline results, meaning, and the key caveat (here, that the data are synthetic).</a:t>
+              <a:t>When a figure isn't supplied the builder shows a placeholder; in normal use figure_placer supplies a theme-matched food-figure plot. Synthetic result.</a:t>
             </a:r>
           </a:p>
         </p:txBody>
@@ -884,6 +886,146 @@
 </file>
 
 <file path=ppt/notesSlides/notesSlide7.xml><?xml version="1.0" encoding="utf-8"?>
+<p:notes xmlns:a="http://schemas.openxmlformats.org/drawingml/2006/main" xmlns:p="http://schemas.openxmlformats.org/presentationml/2006/main" xmlns:r="http://schemas.openxmlformats.org/officeDocument/2006/relationships">
+  <p:cSld>
+    <p:spTree>
+      <p:nvGrpSpPr>
+        <p:cNvPr id="1" name=""/>
+        <p:cNvGrpSpPr/>
+        <p:nvPr/>
+      </p:nvGrpSpPr>
+      <p:grpSpPr>
+        <a:xfrm>
+          <a:off x="0" y="0"/>
+          <a:ext cx="0" cy="0"/>
+          <a:chOff x="0" y="0"/>
+          <a:chExt cx="0" cy="0"/>
+        </a:xfrm>
+      </p:grpSpPr>
+      <p:sp>
+        <p:nvSpPr>
+          <p:cNvPr id="2" name="Slide Image Placeholder 1"/>
+          <p:cNvSpPr>
+            <a:spLocks noGrp="1"/>
+          </p:cNvSpPr>
+          <p:nvPr>
+            <p:ph type="sldImg" idx="2"/>
+          </p:nvPr>
+        </p:nvSpPr>
+        <p:spPr/>
+      </p:sp>
+      <p:sp>
+        <p:nvSpPr>
+          <p:cNvPr id="3" name="Notes Placeholder 2"/>
+          <p:cNvSpPr>
+            <a:spLocks noGrp="1"/>
+          </p:cNvSpPr>
+          <p:nvPr>
+            <p:ph type="body" idx="3" sz="quarter"/>
+          </p:nvPr>
+        </p:nvSpPr>
+        <p:spPr/>
+        <p:txBody>
+          <a:bodyPr/>
+          <a:lstStyle/>
+          <a:p>
+            <a:r>
+              <a:t>A 'metric' big-number hero for the single result the audience should remember. Synthetic value.</a:t>
+            </a:r>
+          </a:p>
+        </p:txBody>
+      </p:sp>
+      <p:sp>
+        <p:nvSpPr>
+          <p:cNvPr id="4" name="Slide Number Placeholder 3"/>
+          <p:cNvSpPr>
+            <a:spLocks noGrp="1"/>
+          </p:cNvSpPr>
+          <p:nvPr>
+            <p:ph type="sldNum" idx="5" sz="quarter"/>
+          </p:nvPr>
+        </p:nvSpPr>
+        <p:spPr/>
+      </p:sp>
+    </p:spTree>
+  </p:cSld>
+  <p:clrMapOvr>
+    <a:masterClrMapping/>
+  </p:clrMapOvr>
+</p:notes>
+</file>
+
+<file path=ppt/notesSlides/notesSlide8.xml><?xml version="1.0" encoding="utf-8"?>
+<p:notes xmlns:a="http://schemas.openxmlformats.org/drawingml/2006/main" xmlns:p="http://schemas.openxmlformats.org/presentationml/2006/main" xmlns:r="http://schemas.openxmlformats.org/officeDocument/2006/relationships">
+  <p:cSld>
+    <p:spTree>
+      <p:nvGrpSpPr>
+        <p:cNvPr id="1" name=""/>
+        <p:cNvGrpSpPr/>
+        <p:nvPr/>
+      </p:nvGrpSpPr>
+      <p:grpSpPr>
+        <a:xfrm>
+          <a:off x="0" y="0"/>
+          <a:ext cx="0" cy="0"/>
+          <a:chOff x="0" y="0"/>
+          <a:chExt cx="0" cy="0"/>
+        </a:xfrm>
+      </p:grpSpPr>
+      <p:sp>
+        <p:nvSpPr>
+          <p:cNvPr id="2" name="Slide Image Placeholder 1"/>
+          <p:cNvSpPr>
+            <a:spLocks noGrp="1"/>
+          </p:cNvSpPr>
+          <p:nvPr>
+            <p:ph type="sldImg" idx="2"/>
+          </p:nvPr>
+        </p:nvSpPr>
+        <p:spPr/>
+      </p:sp>
+      <p:sp>
+        <p:nvSpPr>
+          <p:cNvPr id="3" name="Notes Placeholder 2"/>
+          <p:cNvSpPr>
+            <a:spLocks noGrp="1"/>
+          </p:cNvSpPr>
+          <p:nvPr>
+            <p:ph type="body" idx="3" sz="quarter"/>
+          </p:nvPr>
+        </p:nvSpPr>
+        <p:spPr/>
+        <p:txBody>
+          <a:bodyPr/>
+          <a:lstStyle/>
+          <a:p>
+            <a:r>
+              <a:t>Required closing summary: headline results, meaning, and the key caveat (here, that the data are synthetic).</a:t>
+            </a:r>
+          </a:p>
+        </p:txBody>
+      </p:sp>
+      <p:sp>
+        <p:nvSpPr>
+          <p:cNvPr id="4" name="Slide Number Placeholder 3"/>
+          <p:cNvSpPr>
+            <a:spLocks noGrp="1"/>
+          </p:cNvSpPr>
+          <p:nvPr>
+            <p:ph type="sldNum" idx="5" sz="quarter"/>
+          </p:nvPr>
+        </p:nvSpPr>
+        <p:spPr/>
+      </p:sp>
+    </p:spTree>
+  </p:cSld>
+  <p:clrMapOvr>
+    <a:masterClrMapping/>
+  </p:clrMapOvr>
+</p:notes>
+</file>
+
+<file path=ppt/notesSlides/notesSlide9.xml><?xml version="1.0" encoding="utf-8"?>
 <p:notes xmlns:a="http://schemas.openxmlformats.org/drawingml/2006/main" xmlns:p="http://schemas.openxmlformats.org/presentationml/2006/main" xmlns:r="http://schemas.openxmlformats.org/officeDocument/2006/relationships">
   <p:cSld>
     <p:spTree>
@@ -4030,8 +4172,8 @@
         </p:nvSpPr>
         <p:spPr>
           <a:xfrm>
-            <a:off x="0" y="6309360"/>
-            <a:ext cx="12191695" cy="548640"/>
+            <a:off x="9966960" y="256032"/>
+            <a:ext cx="2221992" cy="6053328"/>
           </a:xfrm>
           <a:prstGeom prst="rect">
             <a:avLst/>
@@ -4068,14 +4210,102 @@
       </p:sp>
       <p:sp>
         <p:nvSpPr>
-          <p:cNvPr id="5" name="TextBox 4"/>
+          <p:cNvPr id="5" name="Rectangle 4"/>
+          <p:cNvSpPr/>
+          <p:nvPr/>
+        </p:nvSpPr>
+        <p:spPr>
+          <a:xfrm>
+            <a:off x="9966960" y="256032"/>
+            <a:ext cx="38100" cy="6053328"/>
+          </a:xfrm>
+          <a:prstGeom prst="rect">
+            <a:avLst/>
+          </a:prstGeom>
+          <a:solidFill>
+            <a:srgbClr val="3FA7A0"/>
+          </a:solidFill>
+          <a:ln>
+            <a:noFill/>
+          </a:ln>
+          <a:effectLst/>
+        </p:spPr>
+        <p:style>
+          <a:lnRef idx="1">
+            <a:schemeClr val="accent1"/>
+          </a:lnRef>
+          <a:fillRef idx="3">
+            <a:schemeClr val="accent1"/>
+          </a:fillRef>
+          <a:effectRef idx="2">
+            <a:schemeClr val="accent1"/>
+          </a:effectRef>
+          <a:fontRef idx="minor">
+            <a:schemeClr val="lt1"/>
+          </a:fontRef>
+        </p:style>
+        <p:txBody>
+          <a:bodyPr rtlCol="0" anchor="ctr"/>
+          <a:lstStyle/>
+          <a:p>
+            <a:pPr algn="ctr"/>
+          </a:p>
+        </p:txBody>
+      </p:sp>
+      <p:sp>
+        <p:nvSpPr>
+          <p:cNvPr id="6" name="Rectangle 5"/>
+          <p:cNvSpPr/>
+          <p:nvPr/>
+        </p:nvSpPr>
+        <p:spPr>
+          <a:xfrm>
+            <a:off x="0" y="6309360"/>
+            <a:ext cx="12191695" cy="548640"/>
+          </a:xfrm>
+          <a:prstGeom prst="rect">
+            <a:avLst/>
+          </a:prstGeom>
+          <a:solidFill>
+            <a:srgbClr val="155E63"/>
+          </a:solidFill>
+          <a:ln>
+            <a:noFill/>
+          </a:ln>
+          <a:effectLst/>
+        </p:spPr>
+        <p:style>
+          <a:lnRef idx="1">
+            <a:schemeClr val="accent1"/>
+          </a:lnRef>
+          <a:fillRef idx="3">
+            <a:schemeClr val="accent1"/>
+          </a:fillRef>
+          <a:effectRef idx="2">
+            <a:schemeClr val="accent1"/>
+          </a:effectRef>
+          <a:fontRef idx="minor">
+            <a:schemeClr val="lt1"/>
+          </a:fontRef>
+        </p:style>
+        <p:txBody>
+          <a:bodyPr rtlCol="0" anchor="ctr"/>
+          <a:lstStyle/>
+          <a:p>
+            <a:pPr algn="ctr"/>
+          </a:p>
+        </p:txBody>
+      </p:sp>
+      <p:sp>
+        <p:nvSpPr>
+          <p:cNvPr id="7" name="TextBox 6"/>
           <p:cNvSpPr txBox="1"/>
           <p:nvPr/>
         </p:nvSpPr>
         <p:spPr>
           <a:xfrm>
-            <a:off x="822960" y="2057400"/>
-            <a:ext cx="10515600" cy="2377440"/>
+            <a:off x="822960" y="1920240"/>
+            <a:ext cx="8869680" cy="2651760"/>
           </a:xfrm>
           <a:prstGeom prst="rect">
             <a:avLst/>
@@ -4089,12 +4319,15 @@
           <a:lstStyle/>
           <a:p>
             <a:pPr>
+              <a:lnSpc>
+                <a:spcPct val="102000"/>
+              </a:lnSpc>
               <a:spcAft>
-                <a:spcPts val="1000"/>
+                <a:spcPts val="1200"/>
               </a:spcAft>
             </a:pPr>
             <a:r>
-              <a:rPr sz="4000" b="1">
+              <a:rPr sz="4600" b="1" spc="-50">
                 <a:solidFill>
                   <a:srgbClr val="155E63"/>
                 </a:solidFill>
@@ -4139,14 +4372,14 @@
       </p:sp>
       <p:sp>
         <p:nvSpPr>
-          <p:cNvPr id="6" name="Rectangle 5"/>
+          <p:cNvPr id="8" name="Rectangle 7"/>
           <p:cNvSpPr/>
           <p:nvPr/>
         </p:nvSpPr>
         <p:spPr>
           <a:xfrm>
-            <a:off x="868680" y="3200400"/>
-            <a:ext cx="2926080" cy="38100"/>
+            <a:off x="868680" y="3337560"/>
+            <a:ext cx="2926080" cy="44450"/>
           </a:xfrm>
           <a:prstGeom prst="rect">
             <a:avLst/>
@@ -4214,6 +4447,50 @@
             <a:avLst/>
           </a:prstGeom>
           <a:solidFill>
+            <a:srgbClr val="FFFFFF"/>
+          </a:solidFill>
+          <a:ln>
+            <a:noFill/>
+          </a:ln>
+          <a:effectLst/>
+        </p:spPr>
+        <p:style>
+          <a:lnRef idx="1">
+            <a:schemeClr val="accent1"/>
+          </a:lnRef>
+          <a:fillRef idx="3">
+            <a:schemeClr val="accent1"/>
+          </a:fillRef>
+          <a:effectRef idx="2">
+            <a:schemeClr val="accent1"/>
+          </a:effectRef>
+          <a:fontRef idx="minor">
+            <a:schemeClr val="lt1"/>
+          </a:fontRef>
+        </p:style>
+        <p:txBody>
+          <a:bodyPr rtlCol="0" anchor="ctr"/>
+          <a:lstStyle/>
+          <a:p>
+            <a:pPr algn="ctr"/>
+          </a:p>
+        </p:txBody>
+      </p:sp>
+      <p:sp>
+        <p:nvSpPr>
+          <p:cNvPr id="3" name="Rectangle 2"/>
+          <p:cNvSpPr/>
+          <p:nvPr/>
+        </p:nvSpPr>
+        <p:spPr>
+          <a:xfrm>
+            <a:off x="0" y="0"/>
+            <a:ext cx="146304" cy="6858000"/>
+          </a:xfrm>
+          <a:prstGeom prst="rect">
+            <a:avLst/>
+          </a:prstGeom>
+          <a:solidFill>
             <a:srgbClr val="155E63"/>
           </a:solidFill>
           <a:ln>
@@ -4245,14 +4522,14 @@
       </p:sp>
       <p:sp>
         <p:nvSpPr>
-          <p:cNvPr id="3" name="TextBox 2"/>
+          <p:cNvPr id="4" name="TextBox 3"/>
           <p:cNvSpPr txBox="1"/>
           <p:nvPr/>
         </p:nvSpPr>
         <p:spPr>
           <a:xfrm>
-            <a:off x="822960" y="0"/>
-            <a:ext cx="10515600" cy="6858000"/>
+            <a:off x="640080" y="384048"/>
+            <a:ext cx="10881360" cy="822960"/>
           </a:xfrm>
           <a:prstGeom prst="rect">
             <a:avLst/>
@@ -4260,7 +4537,7 @@
           <a:noFill/>
         </p:spPr>
         <p:txBody>
-          <a:bodyPr wrap="square" anchor="ctr">
+          <a:bodyPr wrap="square">
             <a:spAutoFit/>
           </a:bodyPr>
           <a:lstStyle/>
@@ -4271,27 +4548,27 @@
               </a:spcAft>
             </a:pPr>
             <a:r>
-              <a:rPr sz="3400" b="1">
+              <a:rPr sz="2600" b="1">
                 <a:solidFill>
-                  <a:srgbClr val="FFFFFF"/>
+                  <a:srgbClr val="155E63"/>
                 </a:solidFill>
                 <a:latin typeface="Calibri"/>
               </a:rPr>
-              <a:t>Experimental design</a:t>
-            </a:r>
-          </a:p>
-        </p:txBody>
-      </p:sp>
-      <p:sp>
-        <p:nvSpPr>
-          <p:cNvPr id="4" name="Rectangle 3"/>
+              <a:t>Study at a glance</a:t>
+            </a:r>
+          </a:p>
+        </p:txBody>
+      </p:sp>
+      <p:sp>
+        <p:nvSpPr>
+          <p:cNvPr id="5" name="Rectangle 4"/>
           <p:cNvSpPr/>
           <p:nvPr/>
         </p:nvSpPr>
         <p:spPr>
           <a:xfrm>
-            <a:off x="868680" y="4160520"/>
-            <a:ext cx="2377440" cy="38100"/>
+            <a:off x="658368" y="1170432"/>
+            <a:ext cx="2011680" cy="27940"/>
           </a:xfrm>
           <a:prstGeom prst="rect">
             <a:avLst/>
@@ -4328,14 +4605,104 @@
       </p:sp>
       <p:sp>
         <p:nvSpPr>
-          <p:cNvPr id="5" name="TextBox 4"/>
+          <p:cNvPr id="6" name="Rounded Rectangle 5"/>
+          <p:cNvSpPr/>
+          <p:nvPr/>
+        </p:nvSpPr>
+        <p:spPr>
+          <a:xfrm>
+            <a:off x="731520" y="1691640"/>
+            <a:ext cx="3352800" cy="4434840"/>
+          </a:xfrm>
+          <a:prstGeom prst="roundRect">
+            <a:avLst/>
+          </a:prstGeom>
+          <a:solidFill>
+            <a:srgbClr val="F1F7F7"/>
+          </a:solidFill>
+          <a:ln w="12700">
+            <a:solidFill>
+              <a:srgbClr val="E8F1F1"/>
+            </a:solidFill>
+          </a:ln>
+          <a:effectLst/>
+        </p:spPr>
+        <p:style>
+          <a:lnRef idx="1">
+            <a:schemeClr val="accent1"/>
+          </a:lnRef>
+          <a:fillRef idx="3">
+            <a:schemeClr val="accent1"/>
+          </a:fillRef>
+          <a:effectRef idx="2">
+            <a:schemeClr val="accent1"/>
+          </a:effectRef>
+          <a:fontRef idx="minor">
+            <a:schemeClr val="lt1"/>
+          </a:fontRef>
+        </p:style>
+        <p:txBody>
+          <a:bodyPr rtlCol="0" anchor="ctr"/>
+          <a:lstStyle/>
+          <a:p>
+            <a:pPr algn="ctr"/>
+          </a:p>
+        </p:txBody>
+      </p:sp>
+      <p:sp>
+        <p:nvSpPr>
+          <p:cNvPr id="7" name="Rectangle 6"/>
+          <p:cNvSpPr/>
+          <p:nvPr/>
+        </p:nvSpPr>
+        <p:spPr>
+          <a:xfrm>
+            <a:off x="841248" y="1801368"/>
+            <a:ext cx="3133344" cy="38100"/>
+          </a:xfrm>
+          <a:prstGeom prst="rect">
+            <a:avLst/>
+          </a:prstGeom>
+          <a:solidFill>
+            <a:srgbClr val="3FA7A0"/>
+          </a:solidFill>
+          <a:ln>
+            <a:noFill/>
+          </a:ln>
+          <a:effectLst/>
+        </p:spPr>
+        <p:style>
+          <a:lnRef idx="1">
+            <a:schemeClr val="accent1"/>
+          </a:lnRef>
+          <a:fillRef idx="3">
+            <a:schemeClr val="accent1"/>
+          </a:fillRef>
+          <a:effectRef idx="2">
+            <a:schemeClr val="accent1"/>
+          </a:effectRef>
+          <a:fontRef idx="minor">
+            <a:schemeClr val="lt1"/>
+          </a:fontRef>
+        </p:style>
+        <p:txBody>
+          <a:bodyPr rtlCol="0" anchor="ctr"/>
+          <a:lstStyle/>
+          <a:p>
+            <a:pPr algn="ctr"/>
+          </a:p>
+        </p:txBody>
+      </p:sp>
+      <p:sp>
+        <p:nvSpPr>
+          <p:cNvPr id="8" name="TextBox 7"/>
           <p:cNvSpPr txBox="1"/>
           <p:nvPr/>
         </p:nvSpPr>
         <p:spPr>
           <a:xfrm>
-            <a:off x="10881360" y="6126480"/>
-            <a:ext cx="640080" cy="365760"/>
+            <a:off x="987552" y="1984248"/>
+            <a:ext cx="2840736" cy="3977640"/>
           </a:xfrm>
           <a:prstGeom prst="rect">
             <a:avLst/>
@@ -4348,15 +4715,443 @@
           </a:bodyPr>
           <a:lstStyle/>
           <a:p>
-            <a:pPr algn="r">
+            <a:pPr>
               <a:spcAft>
                 <a:spcPts val="600"/>
               </a:spcAft>
             </a:pPr>
             <a:r>
-              <a:rPr sz="1100" b="0">
+              <a:rPr sz="3000" b="1" spc="-50">
                 <a:solidFill>
-                  <a:srgbClr val="FFFFFF"/>
+                  <a:srgbClr val="155E63"/>
+                </a:solidFill>
+                <a:latin typeface="Calibri"/>
+              </a:rPr>
+              <a:t>3 arms</a:t>
+            </a:r>
+          </a:p>
+          <a:p>
+            <a:pPr>
+              <a:spcAft>
+                <a:spcPts val="0"/>
+              </a:spcAft>
+            </a:pPr>
+            <a:r>
+              <a:rPr sz="1300" b="0">
+                <a:solidFill>
+                  <a:srgbClr val="10262A"/>
+                </a:solidFill>
+                <a:latin typeface="Calibri"/>
+              </a:rPr>
+              <a:t>Control, HPP 400 MPa, HPP 600 MPa</a:t>
+            </a:r>
+          </a:p>
+        </p:txBody>
+      </p:sp>
+      <p:sp>
+        <p:nvSpPr>
+          <p:cNvPr id="9" name="Rounded Rectangle 8"/>
+          <p:cNvSpPr/>
+          <p:nvPr/>
+        </p:nvSpPr>
+        <p:spPr>
+          <a:xfrm>
+            <a:off x="4404360" y="1691640"/>
+            <a:ext cx="3352800" cy="4434840"/>
+          </a:xfrm>
+          <a:prstGeom prst="roundRect">
+            <a:avLst/>
+          </a:prstGeom>
+          <a:solidFill>
+            <a:srgbClr val="F1F7F7"/>
+          </a:solidFill>
+          <a:ln w="12700">
+            <a:solidFill>
+              <a:srgbClr val="E8F1F1"/>
+            </a:solidFill>
+          </a:ln>
+          <a:effectLst/>
+        </p:spPr>
+        <p:style>
+          <a:lnRef idx="1">
+            <a:schemeClr val="accent1"/>
+          </a:lnRef>
+          <a:fillRef idx="3">
+            <a:schemeClr val="accent1"/>
+          </a:fillRef>
+          <a:effectRef idx="2">
+            <a:schemeClr val="accent1"/>
+          </a:effectRef>
+          <a:fontRef idx="minor">
+            <a:schemeClr val="lt1"/>
+          </a:fontRef>
+        </p:style>
+        <p:txBody>
+          <a:bodyPr rtlCol="0" anchor="ctr"/>
+          <a:lstStyle/>
+          <a:p>
+            <a:pPr algn="ctr"/>
+          </a:p>
+        </p:txBody>
+      </p:sp>
+      <p:sp>
+        <p:nvSpPr>
+          <p:cNvPr id="10" name="Rectangle 9"/>
+          <p:cNvSpPr/>
+          <p:nvPr/>
+        </p:nvSpPr>
+        <p:spPr>
+          <a:xfrm>
+            <a:off x="4514088" y="1801368"/>
+            <a:ext cx="3133344" cy="38100"/>
+          </a:xfrm>
+          <a:prstGeom prst="rect">
+            <a:avLst/>
+          </a:prstGeom>
+          <a:solidFill>
+            <a:srgbClr val="3FA7A0"/>
+          </a:solidFill>
+          <a:ln>
+            <a:noFill/>
+          </a:ln>
+          <a:effectLst/>
+        </p:spPr>
+        <p:style>
+          <a:lnRef idx="1">
+            <a:schemeClr val="accent1"/>
+          </a:lnRef>
+          <a:fillRef idx="3">
+            <a:schemeClr val="accent1"/>
+          </a:fillRef>
+          <a:effectRef idx="2">
+            <a:schemeClr val="accent1"/>
+          </a:effectRef>
+          <a:fontRef idx="minor">
+            <a:schemeClr val="lt1"/>
+          </a:fontRef>
+        </p:style>
+        <p:txBody>
+          <a:bodyPr rtlCol="0" anchor="ctr"/>
+          <a:lstStyle/>
+          <a:p>
+            <a:pPr algn="ctr"/>
+          </a:p>
+        </p:txBody>
+      </p:sp>
+      <p:sp>
+        <p:nvSpPr>
+          <p:cNvPr id="11" name="TextBox 10"/>
+          <p:cNvSpPr txBox="1"/>
+          <p:nvPr/>
+        </p:nvSpPr>
+        <p:spPr>
+          <a:xfrm>
+            <a:off x="4660392" y="1984248"/>
+            <a:ext cx="2840736" cy="3977640"/>
+          </a:xfrm>
+          <a:prstGeom prst="rect">
+            <a:avLst/>
+          </a:prstGeom>
+          <a:noFill/>
+        </p:spPr>
+        <p:txBody>
+          <a:bodyPr wrap="square">
+            <a:spAutoFit/>
+          </a:bodyPr>
+          <a:lstStyle/>
+          <a:p>
+            <a:pPr>
+              <a:spcAft>
+                <a:spcPts val="600"/>
+              </a:spcAft>
+            </a:pPr>
+            <a:r>
+              <a:rPr sz="3000" b="1" spc="-50">
+                <a:solidFill>
+                  <a:srgbClr val="155E63"/>
+                </a:solidFill>
+                <a:latin typeface="Calibri"/>
+              </a:rPr>
+              <a:t>n = 90</a:t>
+            </a:r>
+          </a:p>
+          <a:p>
+            <a:pPr>
+              <a:spcAft>
+                <a:spcPts val="0"/>
+              </a:spcAft>
+            </a:pPr>
+            <a:r>
+              <a:rPr sz="1300" b="0">
+                <a:solidFill>
+                  <a:srgbClr val="10262A"/>
+                </a:solidFill>
+                <a:latin typeface="Calibri"/>
+              </a:rPr>
+              <a:t>30 punnets per arm</a:t>
+            </a:r>
+          </a:p>
+        </p:txBody>
+      </p:sp>
+      <p:sp>
+        <p:nvSpPr>
+          <p:cNvPr id="12" name="Rounded Rectangle 11"/>
+          <p:cNvSpPr/>
+          <p:nvPr/>
+        </p:nvSpPr>
+        <p:spPr>
+          <a:xfrm>
+            <a:off x="8077200" y="1691640"/>
+            <a:ext cx="3352800" cy="4434840"/>
+          </a:xfrm>
+          <a:prstGeom prst="roundRect">
+            <a:avLst/>
+          </a:prstGeom>
+          <a:solidFill>
+            <a:srgbClr val="F1F7F7"/>
+          </a:solidFill>
+          <a:ln w="12700">
+            <a:solidFill>
+              <a:srgbClr val="E8F1F1"/>
+            </a:solidFill>
+          </a:ln>
+          <a:effectLst/>
+        </p:spPr>
+        <p:style>
+          <a:lnRef idx="1">
+            <a:schemeClr val="accent1"/>
+          </a:lnRef>
+          <a:fillRef idx="3">
+            <a:schemeClr val="accent1"/>
+          </a:fillRef>
+          <a:effectRef idx="2">
+            <a:schemeClr val="accent1"/>
+          </a:effectRef>
+          <a:fontRef idx="minor">
+            <a:schemeClr val="lt1"/>
+          </a:fontRef>
+        </p:style>
+        <p:txBody>
+          <a:bodyPr rtlCol="0" anchor="ctr"/>
+          <a:lstStyle/>
+          <a:p>
+            <a:pPr algn="ctr"/>
+          </a:p>
+        </p:txBody>
+      </p:sp>
+      <p:sp>
+        <p:nvSpPr>
+          <p:cNvPr id="13" name="Rectangle 12"/>
+          <p:cNvSpPr/>
+          <p:nvPr/>
+        </p:nvSpPr>
+        <p:spPr>
+          <a:xfrm>
+            <a:off x="8186928" y="1801368"/>
+            <a:ext cx="3133344" cy="38100"/>
+          </a:xfrm>
+          <a:prstGeom prst="rect">
+            <a:avLst/>
+          </a:prstGeom>
+          <a:solidFill>
+            <a:srgbClr val="3FA7A0"/>
+          </a:solidFill>
+          <a:ln>
+            <a:noFill/>
+          </a:ln>
+          <a:effectLst/>
+        </p:spPr>
+        <p:style>
+          <a:lnRef idx="1">
+            <a:schemeClr val="accent1"/>
+          </a:lnRef>
+          <a:fillRef idx="3">
+            <a:schemeClr val="accent1"/>
+          </a:fillRef>
+          <a:effectRef idx="2">
+            <a:schemeClr val="accent1"/>
+          </a:effectRef>
+          <a:fontRef idx="minor">
+            <a:schemeClr val="lt1"/>
+          </a:fontRef>
+        </p:style>
+        <p:txBody>
+          <a:bodyPr rtlCol="0" anchor="ctr"/>
+          <a:lstStyle/>
+          <a:p>
+            <a:pPr algn="ctr"/>
+          </a:p>
+        </p:txBody>
+      </p:sp>
+      <p:sp>
+        <p:nvSpPr>
+          <p:cNvPr id="14" name="TextBox 13"/>
+          <p:cNvSpPr txBox="1"/>
+          <p:nvPr/>
+        </p:nvSpPr>
+        <p:spPr>
+          <a:xfrm>
+            <a:off x="8333232" y="1984248"/>
+            <a:ext cx="2840736" cy="3977640"/>
+          </a:xfrm>
+          <a:prstGeom prst="rect">
+            <a:avLst/>
+          </a:prstGeom>
+          <a:noFill/>
+        </p:spPr>
+        <p:txBody>
+          <a:bodyPr wrap="square">
+            <a:spAutoFit/>
+          </a:bodyPr>
+          <a:lstStyle/>
+          <a:p>
+            <a:pPr>
+              <a:spcAft>
+                <a:spcPts val="600"/>
+              </a:spcAft>
+            </a:pPr>
+            <a:r>
+              <a:rPr sz="3000" b="1" spc="-50">
+                <a:solidFill>
+                  <a:srgbClr val="155E63"/>
+                </a:solidFill>
+                <a:latin typeface="Calibri"/>
+              </a:rPr>
+              <a:t>21 days</a:t>
+            </a:r>
+          </a:p>
+          <a:p>
+            <a:pPr>
+              <a:spcAft>
+                <a:spcPts val="0"/>
+              </a:spcAft>
+            </a:pPr>
+            <a:r>
+              <a:rPr sz="1300" b="0">
+                <a:solidFill>
+                  <a:srgbClr val="10262A"/>
+                </a:solidFill>
+                <a:latin typeface="Calibri"/>
+              </a:rPr>
+              <a:t>refrigerated storage window</a:t>
+            </a:r>
+          </a:p>
+        </p:txBody>
+      </p:sp>
+      <p:sp>
+        <p:nvSpPr>
+          <p:cNvPr id="15" name="Rectangle 14"/>
+          <p:cNvSpPr/>
+          <p:nvPr/>
+        </p:nvSpPr>
+        <p:spPr>
+          <a:xfrm>
+            <a:off x="640080" y="6419088"/>
+            <a:ext cx="10908792" cy="11430"/>
+          </a:xfrm>
+          <a:prstGeom prst="rect">
+            <a:avLst/>
+          </a:prstGeom>
+          <a:solidFill>
+            <a:srgbClr val="E8F1F1"/>
+          </a:solidFill>
+          <a:ln>
+            <a:noFill/>
+          </a:ln>
+          <a:effectLst/>
+        </p:spPr>
+        <p:style>
+          <a:lnRef idx="1">
+            <a:schemeClr val="accent1"/>
+          </a:lnRef>
+          <a:fillRef idx="3">
+            <a:schemeClr val="accent1"/>
+          </a:fillRef>
+          <a:effectRef idx="2">
+            <a:schemeClr val="accent1"/>
+          </a:effectRef>
+          <a:fontRef idx="minor">
+            <a:schemeClr val="lt1"/>
+          </a:fontRef>
+        </p:style>
+        <p:txBody>
+          <a:bodyPr rtlCol="0" anchor="ctr"/>
+          <a:lstStyle/>
+          <a:p>
+            <a:pPr algn="ctr"/>
+          </a:p>
+        </p:txBody>
+      </p:sp>
+      <p:sp>
+        <p:nvSpPr>
+          <p:cNvPr id="16" name="TextBox 15"/>
+          <p:cNvSpPr txBox="1"/>
+          <p:nvPr/>
+        </p:nvSpPr>
+        <p:spPr>
+          <a:xfrm>
+            <a:off x="640080" y="6455664"/>
+            <a:ext cx="8229600" cy="320040"/>
+          </a:xfrm>
+          <a:prstGeom prst="rect">
+            <a:avLst/>
+          </a:prstGeom>
+          <a:noFill/>
+        </p:spPr>
+        <p:txBody>
+          <a:bodyPr wrap="square">
+            <a:spAutoFit/>
+          </a:bodyPr>
+          <a:lstStyle/>
+          <a:p>
+            <a:pPr>
+              <a:spcAft>
+                <a:spcPts val="0"/>
+              </a:spcAft>
+            </a:pPr>
+            <a:r>
+              <a:rPr sz="900" b="0">
+                <a:solidFill>
+                  <a:srgbClr val="51636A"/>
+                </a:solidFill>
+                <a:latin typeface="Calibri"/>
+              </a:rPr>
+              <a:t>food-ppt demo · synthetic data</a:t>
+            </a:r>
+          </a:p>
+        </p:txBody>
+      </p:sp>
+      <p:sp>
+        <p:nvSpPr>
+          <p:cNvPr id="17" name="TextBox 16"/>
+          <p:cNvSpPr txBox="1"/>
+          <p:nvPr/>
+        </p:nvSpPr>
+        <p:spPr>
+          <a:xfrm>
+            <a:off x="10881360" y="6455664"/>
+            <a:ext cx="640080" cy="320040"/>
+          </a:xfrm>
+          <a:prstGeom prst="rect">
+            <a:avLst/>
+          </a:prstGeom>
+          <a:noFill/>
+        </p:spPr>
+        <p:txBody>
+          <a:bodyPr wrap="square">
+            <a:spAutoFit/>
+          </a:bodyPr>
+          <a:lstStyle/>
+          <a:p>
+            <a:pPr algn="r">
+              <a:spcAft>
+                <a:spcPts val="0"/>
+              </a:spcAft>
+            </a:pPr>
+            <a:r>
+              <a:rPr sz="900" b="0">
+                <a:solidFill>
+                  <a:srgbClr val="51636A"/>
                 </a:solidFill>
                 <a:latin typeface="Calibri"/>
               </a:rPr>
@@ -4398,6 +5193,234 @@
             <a:avLst/>
           </a:prstGeom>
           <a:solidFill>
+            <a:srgbClr val="155E63"/>
+          </a:solidFill>
+          <a:ln>
+            <a:noFill/>
+          </a:ln>
+          <a:effectLst/>
+        </p:spPr>
+        <p:style>
+          <a:lnRef idx="1">
+            <a:schemeClr val="accent1"/>
+          </a:lnRef>
+          <a:fillRef idx="3">
+            <a:schemeClr val="accent1"/>
+          </a:fillRef>
+          <a:effectRef idx="2">
+            <a:schemeClr val="accent1"/>
+          </a:effectRef>
+          <a:fontRef idx="minor">
+            <a:schemeClr val="lt1"/>
+          </a:fontRef>
+        </p:style>
+        <p:txBody>
+          <a:bodyPr rtlCol="0" anchor="ctr"/>
+          <a:lstStyle/>
+          <a:p>
+            <a:pPr algn="ctr"/>
+          </a:p>
+        </p:txBody>
+      </p:sp>
+      <p:sp>
+        <p:nvSpPr>
+          <p:cNvPr id="3" name="Rectangle 2"/>
+          <p:cNvSpPr/>
+          <p:nvPr/>
+        </p:nvSpPr>
+        <p:spPr>
+          <a:xfrm>
+            <a:off x="0" y="2697480"/>
+            <a:ext cx="502920" cy="1463040"/>
+          </a:xfrm>
+          <a:prstGeom prst="rect">
+            <a:avLst/>
+          </a:prstGeom>
+          <a:solidFill>
+            <a:srgbClr val="3FA7A0"/>
+          </a:solidFill>
+          <a:ln>
+            <a:noFill/>
+          </a:ln>
+          <a:effectLst/>
+        </p:spPr>
+        <p:style>
+          <a:lnRef idx="1">
+            <a:schemeClr val="accent1"/>
+          </a:lnRef>
+          <a:fillRef idx="3">
+            <a:schemeClr val="accent1"/>
+          </a:fillRef>
+          <a:effectRef idx="2">
+            <a:schemeClr val="accent1"/>
+          </a:effectRef>
+          <a:fontRef idx="minor">
+            <a:schemeClr val="lt1"/>
+          </a:fontRef>
+        </p:style>
+        <p:txBody>
+          <a:bodyPr rtlCol="0" anchor="ctr"/>
+          <a:lstStyle/>
+          <a:p>
+            <a:pPr algn="ctr"/>
+          </a:p>
+        </p:txBody>
+      </p:sp>
+      <p:sp>
+        <p:nvSpPr>
+          <p:cNvPr id="4" name="TextBox 3"/>
+          <p:cNvSpPr txBox="1"/>
+          <p:nvPr/>
+        </p:nvSpPr>
+        <p:spPr>
+          <a:xfrm>
+            <a:off x="822960" y="0"/>
+            <a:ext cx="10515600" cy="6858000"/>
+          </a:xfrm>
+          <a:prstGeom prst="rect">
+            <a:avLst/>
+          </a:prstGeom>
+          <a:noFill/>
+        </p:spPr>
+        <p:txBody>
+          <a:bodyPr wrap="square" anchor="ctr">
+            <a:spAutoFit/>
+          </a:bodyPr>
+          <a:lstStyle/>
+          <a:p>
+            <a:pPr>
+              <a:spcAft>
+                <a:spcPts val="600"/>
+              </a:spcAft>
+            </a:pPr>
+            <a:r>
+              <a:rPr sz="4000" b="1" spc="-50">
+                <a:solidFill>
+                  <a:srgbClr val="FFFFFF"/>
+                </a:solidFill>
+                <a:latin typeface="Calibri"/>
+              </a:rPr>
+              <a:t>Experimental design</a:t>
+            </a:r>
+          </a:p>
+        </p:txBody>
+      </p:sp>
+      <p:sp>
+        <p:nvSpPr>
+          <p:cNvPr id="5" name="Rectangle 4"/>
+          <p:cNvSpPr/>
+          <p:nvPr/>
+        </p:nvSpPr>
+        <p:spPr>
+          <a:xfrm>
+            <a:off x="868680" y="4251960"/>
+            <a:ext cx="2377440" cy="44450"/>
+          </a:xfrm>
+          <a:prstGeom prst="rect">
+            <a:avLst/>
+          </a:prstGeom>
+          <a:solidFill>
+            <a:srgbClr val="3FA7A0"/>
+          </a:solidFill>
+          <a:ln>
+            <a:noFill/>
+          </a:ln>
+          <a:effectLst/>
+        </p:spPr>
+        <p:style>
+          <a:lnRef idx="1">
+            <a:schemeClr val="accent1"/>
+          </a:lnRef>
+          <a:fillRef idx="3">
+            <a:schemeClr val="accent1"/>
+          </a:fillRef>
+          <a:effectRef idx="2">
+            <a:schemeClr val="accent1"/>
+          </a:effectRef>
+          <a:fontRef idx="minor">
+            <a:schemeClr val="lt1"/>
+          </a:fontRef>
+        </p:style>
+        <p:txBody>
+          <a:bodyPr rtlCol="0" anchor="ctr"/>
+          <a:lstStyle/>
+          <a:p>
+            <a:pPr algn="ctr"/>
+          </a:p>
+        </p:txBody>
+      </p:sp>
+      <p:sp>
+        <p:nvSpPr>
+          <p:cNvPr id="6" name="TextBox 5"/>
+          <p:cNvSpPr txBox="1"/>
+          <p:nvPr/>
+        </p:nvSpPr>
+        <p:spPr>
+          <a:xfrm>
+            <a:off x="10881360" y="6126480"/>
+            <a:ext cx="640080" cy="365760"/>
+          </a:xfrm>
+          <a:prstGeom prst="rect">
+            <a:avLst/>
+          </a:prstGeom>
+          <a:noFill/>
+        </p:spPr>
+        <p:txBody>
+          <a:bodyPr wrap="square">
+            <a:spAutoFit/>
+          </a:bodyPr>
+          <a:lstStyle/>
+          <a:p>
+            <a:pPr algn="r">
+              <a:spcAft>
+                <a:spcPts val="600"/>
+              </a:spcAft>
+            </a:pPr>
+            <a:r>
+              <a:rPr sz="1100" b="0">
+                <a:solidFill>
+                  <a:srgbClr val="FFFFFF"/>
+                </a:solidFill>
+                <a:latin typeface="Calibri"/>
+              </a:rPr>
+              <a:t>3</a:t>
+            </a:r>
+          </a:p>
+        </p:txBody>
+      </p:sp>
+    </p:spTree>
+  </p:cSld>
+  <p:clrMapOvr>
+    <a:masterClrMapping/>
+  </p:clrMapOvr>
+</p:sld>
+</file>
+
+<file path=ppt/slides/slide4.xml><?xml version="1.0" encoding="utf-8"?>
+<p:sld xmlns:a="http://schemas.openxmlformats.org/drawingml/2006/main" xmlns:p="http://schemas.openxmlformats.org/presentationml/2006/main" xmlns:r="http://schemas.openxmlformats.org/officeDocument/2006/relationships">
+  <p:cSld>
+    <p:spTree>
+      <p:nvGrpSpPr>
+        <p:cNvPr id="1" name=""/>
+        <p:cNvGrpSpPr/>
+        <p:nvPr/>
+      </p:nvGrpSpPr>
+      <p:grpSpPr/>
+      <p:sp>
+        <p:nvSpPr>
+          <p:cNvPr id="2" name="Rectangle 1"/>
+          <p:cNvSpPr/>
+          <p:nvPr/>
+        </p:nvSpPr>
+        <p:spPr>
+          <a:xfrm>
+            <a:off x="0" y="0"/>
+            <a:ext cx="12191695" cy="6858000"/>
+          </a:xfrm>
+          <a:prstGeom prst="rect">
+            <a:avLst/>
+          </a:prstGeom>
+          <a:solidFill>
             <a:srgbClr val="FFFFFF"/>
           </a:solidFill>
           <a:ln>
@@ -6019,7 +7042,7 @@
                 </a:solidFill>
                 <a:latin typeface="Calibri"/>
               </a:rPr>
-              <a:t>3</a:t>
+              <a:t>4</a:t>
             </a:r>
           </a:p>
         </p:txBody>
@@ -6032,7 +7055,7 @@
 </p:sld>
 </file>
 
-<file path=ppt/slides/slide4.xml><?xml version="1.0" encoding="utf-8"?>
+<file path=ppt/slides/slide5.xml><?xml version="1.0" encoding="utf-8"?>
 <p:sld xmlns:a="http://schemas.openxmlformats.org/drawingml/2006/main" xmlns:p="http://schemas.openxmlformats.org/presentationml/2006/main" xmlns:r="http://schemas.openxmlformats.org/officeDocument/2006/relationships">
   <p:cSld>
     <p:spTree>
@@ -6893,620 +7916,6 @@
                 </a:solidFill>
                 <a:latin typeface="Calibri"/>
               </a:rPr>
-              <a:t>4</a:t>
-            </a:r>
-          </a:p>
-        </p:txBody>
-      </p:sp>
-    </p:spTree>
-  </p:cSld>
-  <p:clrMapOvr>
-    <a:masterClrMapping/>
-  </p:clrMapOvr>
-</p:sld>
-</file>
-
-<file path=ppt/slides/slide5.xml><?xml version="1.0" encoding="utf-8"?>
-<p:sld xmlns:a="http://schemas.openxmlformats.org/drawingml/2006/main" xmlns:p="http://schemas.openxmlformats.org/presentationml/2006/main" xmlns:r="http://schemas.openxmlformats.org/officeDocument/2006/relationships">
-  <p:cSld>
-    <p:spTree>
-      <p:nvGrpSpPr>
-        <p:cNvPr id="1" name=""/>
-        <p:cNvGrpSpPr/>
-        <p:nvPr/>
-      </p:nvGrpSpPr>
-      <p:grpSpPr/>
-      <p:sp>
-        <p:nvSpPr>
-          <p:cNvPr id="2" name="Rectangle 1"/>
-          <p:cNvSpPr/>
-          <p:nvPr/>
-        </p:nvSpPr>
-        <p:spPr>
-          <a:xfrm>
-            <a:off x="0" y="0"/>
-            <a:ext cx="12191695" cy="6858000"/>
-          </a:xfrm>
-          <a:prstGeom prst="rect">
-            <a:avLst/>
-          </a:prstGeom>
-          <a:solidFill>
-            <a:srgbClr val="FFFFFF"/>
-          </a:solidFill>
-          <a:ln>
-            <a:noFill/>
-          </a:ln>
-          <a:effectLst/>
-        </p:spPr>
-        <p:style>
-          <a:lnRef idx="1">
-            <a:schemeClr val="accent1"/>
-          </a:lnRef>
-          <a:fillRef idx="3">
-            <a:schemeClr val="accent1"/>
-          </a:fillRef>
-          <a:effectRef idx="2">
-            <a:schemeClr val="accent1"/>
-          </a:effectRef>
-          <a:fontRef idx="minor">
-            <a:schemeClr val="lt1"/>
-          </a:fontRef>
-        </p:style>
-        <p:txBody>
-          <a:bodyPr rtlCol="0" anchor="ctr"/>
-          <a:lstStyle/>
-          <a:p>
-            <a:pPr algn="ctr"/>
-          </a:p>
-        </p:txBody>
-      </p:sp>
-      <p:sp>
-        <p:nvSpPr>
-          <p:cNvPr id="3" name="Rectangle 2"/>
-          <p:cNvSpPr/>
-          <p:nvPr/>
-        </p:nvSpPr>
-        <p:spPr>
-          <a:xfrm>
-            <a:off x="0" y="0"/>
-            <a:ext cx="146304" cy="6858000"/>
-          </a:xfrm>
-          <a:prstGeom prst="rect">
-            <a:avLst/>
-          </a:prstGeom>
-          <a:solidFill>
-            <a:srgbClr val="155E63"/>
-          </a:solidFill>
-          <a:ln>
-            <a:noFill/>
-          </a:ln>
-          <a:effectLst/>
-        </p:spPr>
-        <p:style>
-          <a:lnRef idx="1">
-            <a:schemeClr val="accent1"/>
-          </a:lnRef>
-          <a:fillRef idx="3">
-            <a:schemeClr val="accent1"/>
-          </a:fillRef>
-          <a:effectRef idx="2">
-            <a:schemeClr val="accent1"/>
-          </a:effectRef>
-          <a:fontRef idx="minor">
-            <a:schemeClr val="lt1"/>
-          </a:fontRef>
-        </p:style>
-        <p:txBody>
-          <a:bodyPr rtlCol="0" anchor="ctr"/>
-          <a:lstStyle/>
-          <a:p>
-            <a:pPr algn="ctr"/>
-          </a:p>
-        </p:txBody>
-      </p:sp>
-      <p:sp>
-        <p:nvSpPr>
-          <p:cNvPr id="4" name="TextBox 3"/>
-          <p:cNvSpPr txBox="1"/>
-          <p:nvPr/>
-        </p:nvSpPr>
-        <p:spPr>
-          <a:xfrm>
-            <a:off x="640080" y="384048"/>
-            <a:ext cx="10881360" cy="822960"/>
-          </a:xfrm>
-          <a:prstGeom prst="rect">
-            <a:avLst/>
-          </a:prstGeom>
-          <a:noFill/>
-        </p:spPr>
-        <p:txBody>
-          <a:bodyPr wrap="square">
-            <a:spAutoFit/>
-          </a:bodyPr>
-          <a:lstStyle/>
-          <a:p>
-            <a:pPr>
-              <a:spcAft>
-                <a:spcPts val="600"/>
-              </a:spcAft>
-            </a:pPr>
-            <a:r>
-              <a:rPr sz="2600" b="1">
-                <a:solidFill>
-                  <a:srgbClr val="155E63"/>
-                </a:solidFill>
-                <a:latin typeface="Calibri"/>
-              </a:rPr>
-              <a:t>Anthocyanins stable through storage</a:t>
-            </a:r>
-          </a:p>
-        </p:txBody>
-      </p:sp>
-      <p:sp>
-        <p:nvSpPr>
-          <p:cNvPr id="5" name="Rectangle 4"/>
-          <p:cNvSpPr/>
-          <p:nvPr/>
-        </p:nvSpPr>
-        <p:spPr>
-          <a:xfrm>
-            <a:off x="658368" y="1170432"/>
-            <a:ext cx="2011680" cy="27940"/>
-          </a:xfrm>
-          <a:prstGeom prst="rect">
-            <a:avLst/>
-          </a:prstGeom>
-          <a:solidFill>
-            <a:srgbClr val="3FA7A0"/>
-          </a:solidFill>
-          <a:ln>
-            <a:noFill/>
-          </a:ln>
-          <a:effectLst/>
-        </p:spPr>
-        <p:style>
-          <a:lnRef idx="1">
-            <a:schemeClr val="accent1"/>
-          </a:lnRef>
-          <a:fillRef idx="3">
-            <a:schemeClr val="accent1"/>
-          </a:fillRef>
-          <a:effectRef idx="2">
-            <a:schemeClr val="accent1"/>
-          </a:effectRef>
-          <a:fontRef idx="minor">
-            <a:schemeClr val="lt1"/>
-          </a:fontRef>
-        </p:style>
-        <p:txBody>
-          <a:bodyPr rtlCol="0" anchor="ctr"/>
-          <a:lstStyle/>
-          <a:p>
-            <a:pPr algn="ctr"/>
-          </a:p>
-        </p:txBody>
-      </p:sp>
-      <p:sp>
-        <p:nvSpPr>
-          <p:cNvPr id="6" name="TextBox 5"/>
-          <p:cNvSpPr txBox="1"/>
-          <p:nvPr/>
-        </p:nvSpPr>
-        <p:spPr>
-          <a:xfrm>
-            <a:off x="731520" y="2926080"/>
-            <a:ext cx="6583680" cy="914400"/>
-          </a:xfrm>
-          <a:prstGeom prst="rect">
-            <a:avLst/>
-          </a:prstGeom>
-          <a:noFill/>
-        </p:spPr>
-        <p:txBody>
-          <a:bodyPr wrap="square">
-            <a:spAutoFit/>
-          </a:bodyPr>
-          <a:lstStyle/>
-          <a:p>
-            <a:pPr>
-              <a:spcAft>
-                <a:spcPts val="600"/>
-              </a:spcAft>
-            </a:pPr>
-            <a:r>
-              <a:rPr sz="1400" b="0">
-                <a:solidFill>
-                  <a:srgbClr val="51636A"/>
-                </a:solidFill>
-                <a:latin typeface="Calibri"/>
-              </a:rPr>
-              <a:t>[figure not found: does-not-exist.png]</a:t>
-            </a:r>
-          </a:p>
-        </p:txBody>
-      </p:sp>
-      <p:sp>
-        <p:nvSpPr>
-          <p:cNvPr id="7" name="TextBox 6"/>
-          <p:cNvSpPr txBox="1"/>
-          <p:nvPr/>
-        </p:nvSpPr>
-        <p:spPr>
-          <a:xfrm>
-            <a:off x="731520" y="5943600"/>
-            <a:ext cx="6766560" cy="457200"/>
-          </a:xfrm>
-          <a:prstGeom prst="rect">
-            <a:avLst/>
-          </a:prstGeom>
-          <a:noFill/>
-        </p:spPr>
-        <p:txBody>
-          <a:bodyPr wrap="square">
-            <a:spAutoFit/>
-          </a:bodyPr>
-          <a:lstStyle/>
-          <a:p>
-            <a:pPr>
-              <a:spcAft>
-                <a:spcPts val="600"/>
-              </a:spcAft>
-            </a:pPr>
-            <a:r>
-              <a:rPr sz="1100" b="0">
-                <a:solidFill>
-                  <a:srgbClr val="51636A"/>
-                </a:solidFill>
-                <a:latin typeface="Calibri"/>
-              </a:rPr>
-              <a:t>Figure 1. Anthocyanin retention over storage (placeholder — in real use, a food-figure plot).</a:t>
-            </a:r>
-          </a:p>
-        </p:txBody>
-      </p:sp>
-      <p:sp>
-        <p:nvSpPr>
-          <p:cNvPr id="8" name="Rectangle 7"/>
-          <p:cNvSpPr/>
-          <p:nvPr/>
-        </p:nvSpPr>
-        <p:spPr>
-          <a:xfrm>
-            <a:off x="7772400" y="1600200"/>
-            <a:ext cx="3749039" cy="4526280"/>
-          </a:xfrm>
-          <a:prstGeom prst="rect">
-            <a:avLst/>
-          </a:prstGeom>
-          <a:solidFill>
-            <a:srgbClr val="F1F7F7"/>
-          </a:solidFill>
-          <a:ln>
-            <a:noFill/>
-          </a:ln>
-          <a:effectLst/>
-        </p:spPr>
-        <p:style>
-          <a:lnRef idx="1">
-            <a:schemeClr val="accent1"/>
-          </a:lnRef>
-          <a:fillRef idx="3">
-            <a:schemeClr val="accent1"/>
-          </a:fillRef>
-          <a:effectRef idx="2">
-            <a:schemeClr val="accent1"/>
-          </a:effectRef>
-          <a:fontRef idx="minor">
-            <a:schemeClr val="lt1"/>
-          </a:fontRef>
-        </p:style>
-        <p:txBody>
-          <a:bodyPr rtlCol="0" anchor="ctr"/>
-          <a:lstStyle/>
-          <a:p>
-            <a:pPr algn="ctr"/>
-          </a:p>
-        </p:txBody>
-      </p:sp>
-      <p:sp>
-        <p:nvSpPr>
-          <p:cNvPr id="9" name="Rectangle 8"/>
-          <p:cNvSpPr/>
-          <p:nvPr/>
-        </p:nvSpPr>
-        <p:spPr>
-          <a:xfrm>
-            <a:off x="7772400" y="1600200"/>
-            <a:ext cx="3749039" cy="457200"/>
-          </a:xfrm>
-          <a:prstGeom prst="rect">
-            <a:avLst/>
-          </a:prstGeom>
-          <a:solidFill>
-            <a:srgbClr val="155E63"/>
-          </a:solidFill>
-          <a:ln>
-            <a:noFill/>
-          </a:ln>
-          <a:effectLst/>
-        </p:spPr>
-        <p:style>
-          <a:lnRef idx="1">
-            <a:schemeClr val="accent1"/>
-          </a:lnRef>
-          <a:fillRef idx="3">
-            <a:schemeClr val="accent1"/>
-          </a:fillRef>
-          <a:effectRef idx="2">
-            <a:schemeClr val="accent1"/>
-          </a:effectRef>
-          <a:fontRef idx="minor">
-            <a:schemeClr val="lt1"/>
-          </a:fontRef>
-        </p:style>
-        <p:txBody>
-          <a:bodyPr rtlCol="0" anchor="ctr"/>
-          <a:lstStyle/>
-          <a:p>
-            <a:pPr algn="ctr"/>
-          </a:p>
-        </p:txBody>
-      </p:sp>
-      <p:sp>
-        <p:nvSpPr>
-          <p:cNvPr id="10" name="TextBox 9"/>
-          <p:cNvSpPr txBox="1"/>
-          <p:nvPr/>
-        </p:nvSpPr>
-        <p:spPr>
-          <a:xfrm>
-            <a:off x="7955279" y="1645920"/>
-            <a:ext cx="3474720" cy="384048"/>
-          </a:xfrm>
-          <a:prstGeom prst="rect">
-            <a:avLst/>
-          </a:prstGeom>
-          <a:noFill/>
-        </p:spPr>
-        <p:txBody>
-          <a:bodyPr wrap="square" anchor="ctr">
-            <a:spAutoFit/>
-          </a:bodyPr>
-          <a:lstStyle/>
-          <a:p>
-            <a:pPr>
-              <a:spcAft>
-                <a:spcPts val="0"/>
-              </a:spcAft>
-            </a:pPr>
-            <a:r>
-              <a:rPr sz="1400" b="1">
-                <a:solidFill>
-                  <a:srgbClr val="FFFFFF"/>
-                </a:solidFill>
-                <a:latin typeface="Calibri"/>
-              </a:rPr>
-              <a:t>Key findings</a:t>
-            </a:r>
-          </a:p>
-        </p:txBody>
-      </p:sp>
-      <p:sp>
-        <p:nvSpPr>
-          <p:cNvPr id="11" name="TextBox 10"/>
-          <p:cNvSpPr txBox="1"/>
-          <p:nvPr/>
-        </p:nvSpPr>
-        <p:spPr>
-          <a:xfrm>
-            <a:off x="7955279" y="2148840"/>
-            <a:ext cx="3429000" cy="3840480"/>
-          </a:xfrm>
-          <a:prstGeom prst="rect">
-            <a:avLst/>
-          </a:prstGeom>
-          <a:noFill/>
-        </p:spPr>
-        <p:txBody>
-          <a:bodyPr wrap="square">
-            <a:spAutoFit/>
-          </a:bodyPr>
-          <a:lstStyle/>
-          <a:p>
-            <a:pPr>
-              <a:spcAft>
-                <a:spcPts val="900"/>
-              </a:spcAft>
-            </a:pPr>
-            <a:r>
-              <a:rPr sz="1300">
-                <a:solidFill>
-                  <a:srgbClr val="155E63"/>
-                </a:solidFill>
-                <a:latin typeface="Calibri"/>
-              </a:rPr>
-              <a:t>▪  </a:t>
-            </a:r>
-            <a:r>
-              <a:rPr sz="1300">
-                <a:solidFill>
-                  <a:srgbClr val="10262A"/>
-                </a:solidFill>
-                <a:latin typeface="Calibri"/>
-              </a:rPr>
-              <a:t>Anthocyanin retention &gt; 85% to day 21</a:t>
-            </a:r>
-          </a:p>
-          <a:p>
-            <a:pPr>
-              <a:spcAft>
-                <a:spcPts val="900"/>
-              </a:spcAft>
-            </a:pPr>
-            <a:r>
-              <a:rPr sz="1300">
-                <a:solidFill>
-                  <a:srgbClr val="155E63"/>
-                </a:solidFill>
-                <a:latin typeface="Calibri"/>
-              </a:rPr>
-              <a:t>▪  </a:t>
-            </a:r>
-            <a:r>
-              <a:rPr sz="1300">
-                <a:solidFill>
-                  <a:srgbClr val="10262A"/>
-                </a:solidFill>
-                <a:latin typeface="Calibri"/>
-              </a:rPr>
-              <a:t>No treatment-by-time interaction</a:t>
-            </a:r>
-          </a:p>
-          <a:p>
-            <a:pPr>
-              <a:spcAft>
-                <a:spcPts val="900"/>
-              </a:spcAft>
-            </a:pPr>
-            <a:r>
-              <a:rPr sz="1300">
-                <a:solidFill>
-                  <a:srgbClr val="155E63"/>
-                </a:solidFill>
-                <a:latin typeface="Calibri"/>
-              </a:rPr>
-              <a:t>▪  </a:t>
-            </a:r>
-            <a:r>
-              <a:rPr sz="1300">
-                <a:solidFill>
-                  <a:srgbClr val="10262A"/>
-                </a:solidFill>
-                <a:latin typeface="Calibri"/>
-              </a:rPr>
-              <a:t>600 MPa comparable to control</a:t>
-            </a:r>
-          </a:p>
-        </p:txBody>
-      </p:sp>
-      <p:sp>
-        <p:nvSpPr>
-          <p:cNvPr id="12" name="Rectangle 11"/>
-          <p:cNvSpPr/>
-          <p:nvPr/>
-        </p:nvSpPr>
-        <p:spPr>
-          <a:xfrm>
-            <a:off x="640080" y="6419088"/>
-            <a:ext cx="10908792" cy="11430"/>
-          </a:xfrm>
-          <a:prstGeom prst="rect">
-            <a:avLst/>
-          </a:prstGeom>
-          <a:solidFill>
-            <a:srgbClr val="E8F1F1"/>
-          </a:solidFill>
-          <a:ln>
-            <a:noFill/>
-          </a:ln>
-          <a:effectLst/>
-        </p:spPr>
-        <p:style>
-          <a:lnRef idx="1">
-            <a:schemeClr val="accent1"/>
-          </a:lnRef>
-          <a:fillRef idx="3">
-            <a:schemeClr val="accent1"/>
-          </a:fillRef>
-          <a:effectRef idx="2">
-            <a:schemeClr val="accent1"/>
-          </a:effectRef>
-          <a:fontRef idx="minor">
-            <a:schemeClr val="lt1"/>
-          </a:fontRef>
-        </p:style>
-        <p:txBody>
-          <a:bodyPr rtlCol="0" anchor="ctr"/>
-          <a:lstStyle/>
-          <a:p>
-            <a:pPr algn="ctr"/>
-          </a:p>
-        </p:txBody>
-      </p:sp>
-      <p:sp>
-        <p:nvSpPr>
-          <p:cNvPr id="13" name="TextBox 12"/>
-          <p:cNvSpPr txBox="1"/>
-          <p:nvPr/>
-        </p:nvSpPr>
-        <p:spPr>
-          <a:xfrm>
-            <a:off x="640080" y="6455664"/>
-            <a:ext cx="8229600" cy="320040"/>
-          </a:xfrm>
-          <a:prstGeom prst="rect">
-            <a:avLst/>
-          </a:prstGeom>
-          <a:noFill/>
-        </p:spPr>
-        <p:txBody>
-          <a:bodyPr wrap="square">
-            <a:spAutoFit/>
-          </a:bodyPr>
-          <a:lstStyle/>
-          <a:p>
-            <a:pPr>
-              <a:spcAft>
-                <a:spcPts val="0"/>
-              </a:spcAft>
-            </a:pPr>
-            <a:r>
-              <a:rPr sz="900" b="0">
-                <a:solidFill>
-                  <a:srgbClr val="51636A"/>
-                </a:solidFill>
-                <a:latin typeface="Calibri"/>
-              </a:rPr>
-              <a:t>food-ppt demo · synthetic data</a:t>
-            </a:r>
-          </a:p>
-        </p:txBody>
-      </p:sp>
-      <p:sp>
-        <p:nvSpPr>
-          <p:cNvPr id="14" name="TextBox 13"/>
-          <p:cNvSpPr txBox="1"/>
-          <p:nvPr/>
-        </p:nvSpPr>
-        <p:spPr>
-          <a:xfrm>
-            <a:off x="10881360" y="6455664"/>
-            <a:ext cx="640080" cy="320040"/>
-          </a:xfrm>
-          <a:prstGeom prst="rect">
-            <a:avLst/>
-          </a:prstGeom>
-          <a:noFill/>
-        </p:spPr>
-        <p:txBody>
-          <a:bodyPr wrap="square">
-            <a:spAutoFit/>
-          </a:bodyPr>
-          <a:lstStyle/>
-          <a:p>
-            <a:pPr algn="r">
-              <a:spcAft>
-                <a:spcPts val="0"/>
-              </a:spcAft>
-            </a:pPr>
-            <a:r>
-              <a:rPr sz="900" b="0">
-                <a:solidFill>
-                  <a:srgbClr val="51636A"/>
-                </a:solidFill>
-                <a:latin typeface="Calibri"/>
-              </a:rPr>
               <a:t>5</a:t>
             </a:r>
           </a:p>
@@ -7652,7 +8061,7 @@
                 </a:solidFill>
                 <a:latin typeface="Calibri"/>
               </a:rPr>
-              <a:t>Executive summary</a:t>
+              <a:t>Anthocyanins stable through storage</a:t>
             </a:r>
           </a:p>
         </p:txBody>
@@ -7709,8 +8118,213 @@
         </p:nvSpPr>
         <p:spPr>
           <a:xfrm>
-            <a:off x="731520" y="1463040"/>
-            <a:ext cx="10789920" cy="4754880"/>
+            <a:off x="731520" y="2926080"/>
+            <a:ext cx="6583680" cy="914400"/>
+          </a:xfrm>
+          <a:prstGeom prst="rect">
+            <a:avLst/>
+          </a:prstGeom>
+          <a:noFill/>
+        </p:spPr>
+        <p:txBody>
+          <a:bodyPr wrap="square">
+            <a:spAutoFit/>
+          </a:bodyPr>
+          <a:lstStyle/>
+          <a:p>
+            <a:pPr>
+              <a:spcAft>
+                <a:spcPts val="600"/>
+              </a:spcAft>
+            </a:pPr>
+            <a:r>
+              <a:rPr sz="1400" b="0">
+                <a:solidFill>
+                  <a:srgbClr val="51636A"/>
+                </a:solidFill>
+                <a:latin typeface="Calibri"/>
+              </a:rPr>
+              <a:t>[figure not found: does-not-exist.png]</a:t>
+            </a:r>
+          </a:p>
+        </p:txBody>
+      </p:sp>
+      <p:sp>
+        <p:nvSpPr>
+          <p:cNvPr id="7" name="TextBox 6"/>
+          <p:cNvSpPr txBox="1"/>
+          <p:nvPr/>
+        </p:nvSpPr>
+        <p:spPr>
+          <a:xfrm>
+            <a:off x="731520" y="5943600"/>
+            <a:ext cx="6766560" cy="457200"/>
+          </a:xfrm>
+          <a:prstGeom prst="rect">
+            <a:avLst/>
+          </a:prstGeom>
+          <a:noFill/>
+        </p:spPr>
+        <p:txBody>
+          <a:bodyPr wrap="square">
+            <a:spAutoFit/>
+          </a:bodyPr>
+          <a:lstStyle/>
+          <a:p>
+            <a:pPr>
+              <a:spcAft>
+                <a:spcPts val="600"/>
+              </a:spcAft>
+            </a:pPr>
+            <a:r>
+              <a:rPr sz="1100" b="0">
+                <a:solidFill>
+                  <a:srgbClr val="51636A"/>
+                </a:solidFill>
+                <a:latin typeface="Calibri"/>
+              </a:rPr>
+              <a:t>Figure 1. Anthocyanin retention over storage (placeholder — in real use, a food-figure plot).</a:t>
+            </a:r>
+          </a:p>
+        </p:txBody>
+      </p:sp>
+      <p:sp>
+        <p:nvSpPr>
+          <p:cNvPr id="8" name="Rectangle 7"/>
+          <p:cNvSpPr/>
+          <p:nvPr/>
+        </p:nvSpPr>
+        <p:spPr>
+          <a:xfrm>
+            <a:off x="7772400" y="1600200"/>
+            <a:ext cx="3749039" cy="4526280"/>
+          </a:xfrm>
+          <a:prstGeom prst="rect">
+            <a:avLst/>
+          </a:prstGeom>
+          <a:solidFill>
+            <a:srgbClr val="F1F7F7"/>
+          </a:solidFill>
+          <a:ln>
+            <a:noFill/>
+          </a:ln>
+          <a:effectLst/>
+        </p:spPr>
+        <p:style>
+          <a:lnRef idx="1">
+            <a:schemeClr val="accent1"/>
+          </a:lnRef>
+          <a:fillRef idx="3">
+            <a:schemeClr val="accent1"/>
+          </a:fillRef>
+          <a:effectRef idx="2">
+            <a:schemeClr val="accent1"/>
+          </a:effectRef>
+          <a:fontRef idx="minor">
+            <a:schemeClr val="lt1"/>
+          </a:fontRef>
+        </p:style>
+        <p:txBody>
+          <a:bodyPr rtlCol="0" anchor="ctr"/>
+          <a:lstStyle/>
+          <a:p>
+            <a:pPr algn="ctr"/>
+          </a:p>
+        </p:txBody>
+      </p:sp>
+      <p:sp>
+        <p:nvSpPr>
+          <p:cNvPr id="9" name="Rectangle 8"/>
+          <p:cNvSpPr/>
+          <p:nvPr/>
+        </p:nvSpPr>
+        <p:spPr>
+          <a:xfrm>
+            <a:off x="7772400" y="1600200"/>
+            <a:ext cx="3749039" cy="457200"/>
+          </a:xfrm>
+          <a:prstGeom prst="rect">
+            <a:avLst/>
+          </a:prstGeom>
+          <a:solidFill>
+            <a:srgbClr val="155E63"/>
+          </a:solidFill>
+          <a:ln>
+            <a:noFill/>
+          </a:ln>
+          <a:effectLst/>
+        </p:spPr>
+        <p:style>
+          <a:lnRef idx="1">
+            <a:schemeClr val="accent1"/>
+          </a:lnRef>
+          <a:fillRef idx="3">
+            <a:schemeClr val="accent1"/>
+          </a:fillRef>
+          <a:effectRef idx="2">
+            <a:schemeClr val="accent1"/>
+          </a:effectRef>
+          <a:fontRef idx="minor">
+            <a:schemeClr val="lt1"/>
+          </a:fontRef>
+        </p:style>
+        <p:txBody>
+          <a:bodyPr rtlCol="0" anchor="ctr"/>
+          <a:lstStyle/>
+          <a:p>
+            <a:pPr algn="ctr"/>
+          </a:p>
+        </p:txBody>
+      </p:sp>
+      <p:sp>
+        <p:nvSpPr>
+          <p:cNvPr id="10" name="TextBox 9"/>
+          <p:cNvSpPr txBox="1"/>
+          <p:nvPr/>
+        </p:nvSpPr>
+        <p:spPr>
+          <a:xfrm>
+            <a:off x="7955279" y="1645920"/>
+            <a:ext cx="3474720" cy="384048"/>
+          </a:xfrm>
+          <a:prstGeom prst="rect">
+            <a:avLst/>
+          </a:prstGeom>
+          <a:noFill/>
+        </p:spPr>
+        <p:txBody>
+          <a:bodyPr wrap="square" anchor="ctr">
+            <a:spAutoFit/>
+          </a:bodyPr>
+          <a:lstStyle/>
+          <a:p>
+            <a:pPr>
+              <a:spcAft>
+                <a:spcPts val="0"/>
+              </a:spcAft>
+            </a:pPr>
+            <a:r>
+              <a:rPr sz="1400" b="1">
+                <a:solidFill>
+                  <a:srgbClr val="FFFFFF"/>
+                </a:solidFill>
+                <a:latin typeface="Calibri"/>
+              </a:rPr>
+              <a:t>Key findings</a:t>
+            </a:r>
+          </a:p>
+        </p:txBody>
+      </p:sp>
+      <p:sp>
+        <p:nvSpPr>
+          <p:cNvPr id="11" name="TextBox 10"/>
+          <p:cNvSpPr txBox="1"/>
+          <p:nvPr/>
+        </p:nvSpPr>
+        <p:spPr>
+          <a:xfrm>
+            <a:off x="7955279" y="2148840"/>
+            <a:ext cx="3429000" cy="3840480"/>
           </a:xfrm>
           <a:prstGeom prst="rect">
             <a:avLst/>
@@ -7729,7 +8343,7 @@
               </a:spcAft>
             </a:pPr>
             <a:r>
-              <a:rPr sz="1800">
+              <a:rPr sz="1300">
                 <a:solidFill>
                   <a:srgbClr val="155E63"/>
                 </a:solidFill>
@@ -7738,13 +8352,13 @@
               <a:t>▪  </a:t>
             </a:r>
             <a:r>
-              <a:rPr sz="1800">
+              <a:rPr sz="1300">
                 <a:solidFill>
                   <a:srgbClr val="10262A"/>
                 </a:solidFill>
                 <a:latin typeface="Calibri"/>
               </a:rPr>
-              <a:t>HPP preserved firmness and reduced weight loss vs control</a:t>
+              <a:t>Anthocyanin retention &gt; 85% to day 21</a:t>
             </a:r>
           </a:p>
           <a:p>
@@ -7754,7 +8368,7 @@
               </a:spcAft>
             </a:pPr>
             <a:r>
-              <a:rPr sz="1800">
+              <a:rPr sz="1300">
                 <a:solidFill>
                   <a:srgbClr val="155E63"/>
                 </a:solidFill>
@@ -7763,13 +8377,13 @@
               <a:t>▪  </a:t>
             </a:r>
             <a:r>
-              <a:rPr sz="1800">
+              <a:rPr sz="1300">
                 <a:solidFill>
                   <a:srgbClr val="10262A"/>
                 </a:solidFill>
                 <a:latin typeface="Calibri"/>
               </a:rPr>
-              <a:t>600 MPa was the best-performing condition overall</a:t>
+              <a:t>No treatment-by-time interaction</a:t>
             </a:r>
           </a:p>
           <a:p>
@@ -7779,7 +8393,7 @@
               </a:spcAft>
             </a:pPr>
             <a:r>
-              <a:rPr sz="1800">
+              <a:rPr sz="1300">
                 <a:solidFill>
                   <a:srgbClr val="155E63"/>
                 </a:solidFill>
@@ -7788,45 +8402,20 @@
               <a:t>▪  </a:t>
             </a:r>
             <a:r>
-              <a:rPr sz="1800">
+              <a:rPr sz="1300">
                 <a:solidFill>
                   <a:srgbClr val="10262A"/>
                 </a:solidFill>
                 <a:latin typeface="Calibri"/>
               </a:rPr>
-              <a:t>Anthocyanins remained stable through 21-day storage</a:t>
-            </a:r>
-          </a:p>
-          <a:p>
-            <a:pPr>
-              <a:spcAft>
-                <a:spcPts val="900"/>
-              </a:spcAft>
-            </a:pPr>
-            <a:r>
-              <a:rPr sz="1800">
-                <a:solidFill>
-                  <a:srgbClr val="155E63"/>
-                </a:solidFill>
-                <a:latin typeface="Calibri"/>
-              </a:rPr>
-              <a:t>▪  </a:t>
-            </a:r>
-            <a:r>
-              <a:rPr sz="1800">
-                <a:solidFill>
-                  <a:srgbClr val="10262A"/>
-                </a:solidFill>
-                <a:latin typeface="Calibri"/>
-              </a:rPr>
-              <a:t>Illustrative demo — all figures/numbers are synthetic</a:t>
-            </a:r>
-          </a:p>
-        </p:txBody>
-      </p:sp>
-      <p:sp>
-        <p:nvSpPr>
-          <p:cNvPr id="7" name="Rectangle 6"/>
+              <a:t>600 MPa comparable to control</a:t>
+            </a:r>
+          </a:p>
+        </p:txBody>
+      </p:sp>
+      <p:sp>
+        <p:nvSpPr>
+          <p:cNvPr id="12" name="Rectangle 11"/>
           <p:cNvSpPr/>
           <p:nvPr/>
         </p:nvSpPr>
@@ -7870,7 +8459,7 @@
       </p:sp>
       <p:sp>
         <p:nvSpPr>
-          <p:cNvPr id="8" name="TextBox 7"/>
+          <p:cNvPr id="13" name="TextBox 12"/>
           <p:cNvSpPr txBox="1"/>
           <p:nvPr/>
         </p:nvSpPr>
@@ -7909,7 +8498,7 @@
       </p:sp>
       <p:sp>
         <p:nvSpPr>
-          <p:cNvPr id="9" name="TextBox 8"/>
+          <p:cNvPr id="14" name="TextBox 13"/>
           <p:cNvSpPr txBox="1"/>
           <p:nvPr/>
         </p:nvSpPr>
@@ -7979,6 +8568,50 @@
             <a:avLst/>
           </a:prstGeom>
           <a:solidFill>
+            <a:srgbClr val="E8F1F1"/>
+          </a:solidFill>
+          <a:ln>
+            <a:noFill/>
+          </a:ln>
+          <a:effectLst/>
+        </p:spPr>
+        <p:style>
+          <a:lnRef idx="1">
+            <a:schemeClr val="accent1"/>
+          </a:lnRef>
+          <a:fillRef idx="3">
+            <a:schemeClr val="accent1"/>
+          </a:fillRef>
+          <a:effectRef idx="2">
+            <a:schemeClr val="accent1"/>
+          </a:effectRef>
+          <a:fontRef idx="minor">
+            <a:schemeClr val="lt1"/>
+          </a:fontRef>
+        </p:style>
+        <p:txBody>
+          <a:bodyPr rtlCol="0" anchor="ctr"/>
+          <a:lstStyle/>
+          <a:p>
+            <a:pPr algn="ctr"/>
+          </a:p>
+        </p:txBody>
+      </p:sp>
+      <p:sp>
+        <p:nvSpPr>
+          <p:cNvPr id="3" name="Rectangle 2"/>
+          <p:cNvSpPr/>
+          <p:nvPr/>
+        </p:nvSpPr>
+        <p:spPr>
+          <a:xfrm>
+            <a:off x="0" y="0"/>
+            <a:ext cx="146304" cy="6858000"/>
+          </a:xfrm>
+          <a:prstGeom prst="rect">
+            <a:avLst/>
+          </a:prstGeom>
+          <a:solidFill>
             <a:srgbClr val="155E63"/>
           </a:solidFill>
           <a:ln>
@@ -8010,14 +8643,14 @@
       </p:sp>
       <p:sp>
         <p:nvSpPr>
-          <p:cNvPr id="3" name="TextBox 2"/>
+          <p:cNvPr id="4" name="TextBox 3"/>
           <p:cNvSpPr txBox="1"/>
           <p:nvPr/>
         </p:nvSpPr>
         <p:spPr>
           <a:xfrm>
-            <a:off x="822960" y="0"/>
-            <a:ext cx="10515600" cy="6858000"/>
+            <a:off x="640080" y="384048"/>
+            <a:ext cx="10881360" cy="822960"/>
           </a:xfrm>
           <a:prstGeom prst="rect">
             <a:avLst/>
@@ -8025,7 +8658,7 @@
           <a:noFill/>
         </p:spPr>
         <p:txBody>
-          <a:bodyPr wrap="square" anchor="ctr">
+          <a:bodyPr wrap="square">
             <a:spAutoFit/>
           </a:bodyPr>
           <a:lstStyle/>
@@ -8036,27 +8669,27 @@
               </a:spcAft>
             </a:pPr>
             <a:r>
-              <a:rPr sz="3400" b="1">
+              <a:rPr sz="2600" b="1">
                 <a:solidFill>
-                  <a:srgbClr val="FFFFFF"/>
+                  <a:srgbClr val="155E63"/>
                 </a:solidFill>
                 <a:latin typeface="Calibri"/>
               </a:rPr>
-              <a:t>AI-use disclosure</a:t>
-            </a:r>
-          </a:p>
-        </p:txBody>
-      </p:sp>
-      <p:sp>
-        <p:nvSpPr>
-          <p:cNvPr id="4" name="Rectangle 3"/>
+              <a:t>Headline result</a:t>
+            </a:r>
+          </a:p>
+        </p:txBody>
+      </p:sp>
+      <p:sp>
+        <p:nvSpPr>
+          <p:cNvPr id="5" name="Rectangle 4"/>
           <p:cNvSpPr/>
           <p:nvPr/>
         </p:nvSpPr>
         <p:spPr>
           <a:xfrm>
-            <a:off x="868680" y="4160520"/>
-            <a:ext cx="2377440" cy="38100"/>
+            <a:off x="658368" y="1170432"/>
+            <a:ext cx="2011680" cy="27940"/>
           </a:xfrm>
           <a:prstGeom prst="rect">
             <a:avLst/>
@@ -8093,7 +8726,823 @@
       </p:sp>
       <p:sp>
         <p:nvSpPr>
-          <p:cNvPr id="5" name="TextBox 4"/>
+          <p:cNvPr id="6" name="TextBox 5"/>
+          <p:cNvSpPr txBox="1"/>
+          <p:nvPr/>
+        </p:nvSpPr>
+        <p:spPr>
+          <a:xfrm>
+            <a:off x="914400" y="2286000"/>
+            <a:ext cx="10332720" cy="2194560"/>
+          </a:xfrm>
+          <a:prstGeom prst="rect">
+            <a:avLst/>
+          </a:prstGeom>
+          <a:noFill/>
+        </p:spPr>
+        <p:txBody>
+          <a:bodyPr wrap="square" anchor="ctr">
+            <a:spAutoFit/>
+          </a:bodyPr>
+          <a:lstStyle/>
+          <a:p>
+            <a:pPr algn="ctr">
+              <a:spcAft>
+                <a:spcPts val="400"/>
+              </a:spcAft>
+            </a:pPr>
+            <a:r>
+              <a:rPr sz="9600" b="1" spc="-100">
+                <a:solidFill>
+                  <a:srgbClr val="155E63"/>
+                </a:solidFill>
+                <a:latin typeface="Calibri"/>
+              </a:rPr>
+              <a:t>-23 pts</a:t>
+            </a:r>
+          </a:p>
+          <a:p>
+            <a:pPr algn="ctr">
+              <a:spcAft>
+                <a:spcPts val="200"/>
+              </a:spcAft>
+            </a:pPr>
+            <a:r>
+              <a:rPr sz="2400" b="0">
+                <a:solidFill>
+                  <a:srgbClr val="10262A"/>
+                </a:solidFill>
+                <a:latin typeface="Calibri"/>
+              </a:rPr>
+              <a:t>weight loss vs control at 600 MPa</a:t>
+            </a:r>
+          </a:p>
+          <a:p>
+            <a:pPr algn="ctr">
+              <a:spcAft>
+                <a:spcPts val="0"/>
+              </a:spcAft>
+            </a:pPr>
+            <a:r>
+              <a:rPr sz="1500" b="0">
+                <a:solidFill>
+                  <a:srgbClr val="51636A"/>
+                </a:solidFill>
+                <a:latin typeface="Calibri"/>
+              </a:rPr>
+              <a:t>31.4% → 8.1% (illustrative p &lt; 0.05)</a:t>
+            </a:r>
+          </a:p>
+        </p:txBody>
+      </p:sp>
+      <p:sp>
+        <p:nvSpPr>
+          <p:cNvPr id="7" name="Rectangle 6"/>
+          <p:cNvSpPr/>
+          <p:nvPr/>
+        </p:nvSpPr>
+        <p:spPr>
+          <a:xfrm>
+            <a:off x="640080" y="6419088"/>
+            <a:ext cx="10908792" cy="11430"/>
+          </a:xfrm>
+          <a:prstGeom prst="rect">
+            <a:avLst/>
+          </a:prstGeom>
+          <a:solidFill>
+            <a:srgbClr val="E8F1F1"/>
+          </a:solidFill>
+          <a:ln>
+            <a:noFill/>
+          </a:ln>
+          <a:effectLst/>
+        </p:spPr>
+        <p:style>
+          <a:lnRef idx="1">
+            <a:schemeClr val="accent1"/>
+          </a:lnRef>
+          <a:fillRef idx="3">
+            <a:schemeClr val="accent1"/>
+          </a:fillRef>
+          <a:effectRef idx="2">
+            <a:schemeClr val="accent1"/>
+          </a:effectRef>
+          <a:fontRef idx="minor">
+            <a:schemeClr val="lt1"/>
+          </a:fontRef>
+        </p:style>
+        <p:txBody>
+          <a:bodyPr rtlCol="0" anchor="ctr"/>
+          <a:lstStyle/>
+          <a:p>
+            <a:pPr algn="ctr"/>
+          </a:p>
+        </p:txBody>
+      </p:sp>
+      <p:sp>
+        <p:nvSpPr>
+          <p:cNvPr id="8" name="TextBox 7"/>
+          <p:cNvSpPr txBox="1"/>
+          <p:nvPr/>
+        </p:nvSpPr>
+        <p:spPr>
+          <a:xfrm>
+            <a:off x="640080" y="6455664"/>
+            <a:ext cx="8229600" cy="320040"/>
+          </a:xfrm>
+          <a:prstGeom prst="rect">
+            <a:avLst/>
+          </a:prstGeom>
+          <a:noFill/>
+        </p:spPr>
+        <p:txBody>
+          <a:bodyPr wrap="square">
+            <a:spAutoFit/>
+          </a:bodyPr>
+          <a:lstStyle/>
+          <a:p>
+            <a:pPr>
+              <a:spcAft>
+                <a:spcPts val="0"/>
+              </a:spcAft>
+            </a:pPr>
+            <a:r>
+              <a:rPr sz="900" b="0">
+                <a:solidFill>
+                  <a:srgbClr val="51636A"/>
+                </a:solidFill>
+                <a:latin typeface="Calibri"/>
+              </a:rPr>
+              <a:t>food-ppt demo · synthetic data</a:t>
+            </a:r>
+          </a:p>
+        </p:txBody>
+      </p:sp>
+      <p:sp>
+        <p:nvSpPr>
+          <p:cNvPr id="9" name="TextBox 8"/>
+          <p:cNvSpPr txBox="1"/>
+          <p:nvPr/>
+        </p:nvSpPr>
+        <p:spPr>
+          <a:xfrm>
+            <a:off x="10881360" y="6455664"/>
+            <a:ext cx="640080" cy="320040"/>
+          </a:xfrm>
+          <a:prstGeom prst="rect">
+            <a:avLst/>
+          </a:prstGeom>
+          <a:noFill/>
+        </p:spPr>
+        <p:txBody>
+          <a:bodyPr wrap="square">
+            <a:spAutoFit/>
+          </a:bodyPr>
+          <a:lstStyle/>
+          <a:p>
+            <a:pPr algn="r">
+              <a:spcAft>
+                <a:spcPts val="0"/>
+              </a:spcAft>
+            </a:pPr>
+            <a:r>
+              <a:rPr sz="900" b="0">
+                <a:solidFill>
+                  <a:srgbClr val="51636A"/>
+                </a:solidFill>
+                <a:latin typeface="Calibri"/>
+              </a:rPr>
+              <a:t>7</a:t>
+            </a:r>
+          </a:p>
+        </p:txBody>
+      </p:sp>
+    </p:spTree>
+  </p:cSld>
+  <p:clrMapOvr>
+    <a:masterClrMapping/>
+  </p:clrMapOvr>
+</p:sld>
+</file>
+
+<file path=ppt/slides/slide8.xml><?xml version="1.0" encoding="utf-8"?>
+<p:sld xmlns:a="http://schemas.openxmlformats.org/drawingml/2006/main" xmlns:p="http://schemas.openxmlformats.org/presentationml/2006/main" xmlns:r="http://schemas.openxmlformats.org/officeDocument/2006/relationships">
+  <p:cSld>
+    <p:spTree>
+      <p:nvGrpSpPr>
+        <p:cNvPr id="1" name=""/>
+        <p:cNvGrpSpPr/>
+        <p:nvPr/>
+      </p:nvGrpSpPr>
+      <p:grpSpPr/>
+      <p:sp>
+        <p:nvSpPr>
+          <p:cNvPr id="2" name="Rectangle 1"/>
+          <p:cNvSpPr/>
+          <p:nvPr/>
+        </p:nvSpPr>
+        <p:spPr>
+          <a:xfrm>
+            <a:off x="0" y="0"/>
+            <a:ext cx="12191695" cy="6858000"/>
+          </a:xfrm>
+          <a:prstGeom prst="rect">
+            <a:avLst/>
+          </a:prstGeom>
+          <a:solidFill>
+            <a:srgbClr val="FFFFFF"/>
+          </a:solidFill>
+          <a:ln>
+            <a:noFill/>
+          </a:ln>
+          <a:effectLst/>
+        </p:spPr>
+        <p:style>
+          <a:lnRef idx="1">
+            <a:schemeClr val="accent1"/>
+          </a:lnRef>
+          <a:fillRef idx="3">
+            <a:schemeClr val="accent1"/>
+          </a:fillRef>
+          <a:effectRef idx="2">
+            <a:schemeClr val="accent1"/>
+          </a:effectRef>
+          <a:fontRef idx="minor">
+            <a:schemeClr val="lt1"/>
+          </a:fontRef>
+        </p:style>
+        <p:txBody>
+          <a:bodyPr rtlCol="0" anchor="ctr"/>
+          <a:lstStyle/>
+          <a:p>
+            <a:pPr algn="ctr"/>
+          </a:p>
+        </p:txBody>
+      </p:sp>
+      <p:sp>
+        <p:nvSpPr>
+          <p:cNvPr id="3" name="Rectangle 2"/>
+          <p:cNvSpPr/>
+          <p:nvPr/>
+        </p:nvSpPr>
+        <p:spPr>
+          <a:xfrm>
+            <a:off x="0" y="0"/>
+            <a:ext cx="146304" cy="6858000"/>
+          </a:xfrm>
+          <a:prstGeom prst="rect">
+            <a:avLst/>
+          </a:prstGeom>
+          <a:solidFill>
+            <a:srgbClr val="155E63"/>
+          </a:solidFill>
+          <a:ln>
+            <a:noFill/>
+          </a:ln>
+          <a:effectLst/>
+        </p:spPr>
+        <p:style>
+          <a:lnRef idx="1">
+            <a:schemeClr val="accent1"/>
+          </a:lnRef>
+          <a:fillRef idx="3">
+            <a:schemeClr val="accent1"/>
+          </a:fillRef>
+          <a:effectRef idx="2">
+            <a:schemeClr val="accent1"/>
+          </a:effectRef>
+          <a:fontRef idx="minor">
+            <a:schemeClr val="lt1"/>
+          </a:fontRef>
+        </p:style>
+        <p:txBody>
+          <a:bodyPr rtlCol="0" anchor="ctr"/>
+          <a:lstStyle/>
+          <a:p>
+            <a:pPr algn="ctr"/>
+          </a:p>
+        </p:txBody>
+      </p:sp>
+      <p:sp>
+        <p:nvSpPr>
+          <p:cNvPr id="4" name="TextBox 3"/>
+          <p:cNvSpPr txBox="1"/>
+          <p:nvPr/>
+        </p:nvSpPr>
+        <p:spPr>
+          <a:xfrm>
+            <a:off x="640080" y="384048"/>
+            <a:ext cx="10881360" cy="822960"/>
+          </a:xfrm>
+          <a:prstGeom prst="rect">
+            <a:avLst/>
+          </a:prstGeom>
+          <a:noFill/>
+        </p:spPr>
+        <p:txBody>
+          <a:bodyPr wrap="square">
+            <a:spAutoFit/>
+          </a:bodyPr>
+          <a:lstStyle/>
+          <a:p>
+            <a:pPr>
+              <a:spcAft>
+                <a:spcPts val="600"/>
+              </a:spcAft>
+            </a:pPr>
+            <a:r>
+              <a:rPr sz="2600" b="1">
+                <a:solidFill>
+                  <a:srgbClr val="155E63"/>
+                </a:solidFill>
+                <a:latin typeface="Calibri"/>
+              </a:rPr>
+              <a:t>Executive summary</a:t>
+            </a:r>
+          </a:p>
+        </p:txBody>
+      </p:sp>
+      <p:sp>
+        <p:nvSpPr>
+          <p:cNvPr id="5" name="Rectangle 4"/>
+          <p:cNvSpPr/>
+          <p:nvPr/>
+        </p:nvSpPr>
+        <p:spPr>
+          <a:xfrm>
+            <a:off x="658368" y="1170432"/>
+            <a:ext cx="2011680" cy="27940"/>
+          </a:xfrm>
+          <a:prstGeom prst="rect">
+            <a:avLst/>
+          </a:prstGeom>
+          <a:solidFill>
+            <a:srgbClr val="3FA7A0"/>
+          </a:solidFill>
+          <a:ln>
+            <a:noFill/>
+          </a:ln>
+          <a:effectLst/>
+        </p:spPr>
+        <p:style>
+          <a:lnRef idx="1">
+            <a:schemeClr val="accent1"/>
+          </a:lnRef>
+          <a:fillRef idx="3">
+            <a:schemeClr val="accent1"/>
+          </a:fillRef>
+          <a:effectRef idx="2">
+            <a:schemeClr val="accent1"/>
+          </a:effectRef>
+          <a:fontRef idx="minor">
+            <a:schemeClr val="lt1"/>
+          </a:fontRef>
+        </p:style>
+        <p:txBody>
+          <a:bodyPr rtlCol="0" anchor="ctr"/>
+          <a:lstStyle/>
+          <a:p>
+            <a:pPr algn="ctr"/>
+          </a:p>
+        </p:txBody>
+      </p:sp>
+      <p:sp>
+        <p:nvSpPr>
+          <p:cNvPr id="6" name="TextBox 5"/>
+          <p:cNvSpPr txBox="1"/>
+          <p:nvPr/>
+        </p:nvSpPr>
+        <p:spPr>
+          <a:xfrm>
+            <a:off x="731520" y="1463040"/>
+            <a:ext cx="10789920" cy="4754880"/>
+          </a:xfrm>
+          <a:prstGeom prst="rect">
+            <a:avLst/>
+          </a:prstGeom>
+          <a:noFill/>
+        </p:spPr>
+        <p:txBody>
+          <a:bodyPr wrap="square">
+            <a:spAutoFit/>
+          </a:bodyPr>
+          <a:lstStyle/>
+          <a:p>
+            <a:pPr>
+              <a:spcAft>
+                <a:spcPts val="900"/>
+              </a:spcAft>
+            </a:pPr>
+            <a:r>
+              <a:rPr sz="1800">
+                <a:solidFill>
+                  <a:srgbClr val="155E63"/>
+                </a:solidFill>
+                <a:latin typeface="Calibri"/>
+              </a:rPr>
+              <a:t>▪  </a:t>
+            </a:r>
+            <a:r>
+              <a:rPr sz="1800">
+                <a:solidFill>
+                  <a:srgbClr val="10262A"/>
+                </a:solidFill>
+                <a:latin typeface="Calibri"/>
+              </a:rPr>
+              <a:t>HPP preserved firmness and reduced weight loss vs control</a:t>
+            </a:r>
+          </a:p>
+          <a:p>
+            <a:pPr>
+              <a:spcAft>
+                <a:spcPts val="900"/>
+              </a:spcAft>
+            </a:pPr>
+            <a:r>
+              <a:rPr sz="1800">
+                <a:solidFill>
+                  <a:srgbClr val="155E63"/>
+                </a:solidFill>
+                <a:latin typeface="Calibri"/>
+              </a:rPr>
+              <a:t>▪  </a:t>
+            </a:r>
+            <a:r>
+              <a:rPr sz="1800">
+                <a:solidFill>
+                  <a:srgbClr val="10262A"/>
+                </a:solidFill>
+                <a:latin typeface="Calibri"/>
+              </a:rPr>
+              <a:t>600 MPa was the best-performing condition overall</a:t>
+            </a:r>
+          </a:p>
+          <a:p>
+            <a:pPr>
+              <a:spcAft>
+                <a:spcPts val="900"/>
+              </a:spcAft>
+            </a:pPr>
+            <a:r>
+              <a:rPr sz="1800">
+                <a:solidFill>
+                  <a:srgbClr val="155E63"/>
+                </a:solidFill>
+                <a:latin typeface="Calibri"/>
+              </a:rPr>
+              <a:t>▪  </a:t>
+            </a:r>
+            <a:r>
+              <a:rPr sz="1800">
+                <a:solidFill>
+                  <a:srgbClr val="10262A"/>
+                </a:solidFill>
+                <a:latin typeface="Calibri"/>
+              </a:rPr>
+              <a:t>Anthocyanins remained stable through 21-day storage</a:t>
+            </a:r>
+          </a:p>
+          <a:p>
+            <a:pPr>
+              <a:spcAft>
+                <a:spcPts val="900"/>
+              </a:spcAft>
+            </a:pPr>
+            <a:r>
+              <a:rPr sz="1800">
+                <a:solidFill>
+                  <a:srgbClr val="155E63"/>
+                </a:solidFill>
+                <a:latin typeface="Calibri"/>
+              </a:rPr>
+              <a:t>▪  </a:t>
+            </a:r>
+            <a:r>
+              <a:rPr sz="1800">
+                <a:solidFill>
+                  <a:srgbClr val="10262A"/>
+                </a:solidFill>
+                <a:latin typeface="Calibri"/>
+              </a:rPr>
+              <a:t>Illustrative demo — all figures/numbers are synthetic</a:t>
+            </a:r>
+          </a:p>
+        </p:txBody>
+      </p:sp>
+      <p:sp>
+        <p:nvSpPr>
+          <p:cNvPr id="7" name="Rectangle 6"/>
+          <p:cNvSpPr/>
+          <p:nvPr/>
+        </p:nvSpPr>
+        <p:spPr>
+          <a:xfrm>
+            <a:off x="640080" y="6419088"/>
+            <a:ext cx="10908792" cy="11430"/>
+          </a:xfrm>
+          <a:prstGeom prst="rect">
+            <a:avLst/>
+          </a:prstGeom>
+          <a:solidFill>
+            <a:srgbClr val="E8F1F1"/>
+          </a:solidFill>
+          <a:ln>
+            <a:noFill/>
+          </a:ln>
+          <a:effectLst/>
+        </p:spPr>
+        <p:style>
+          <a:lnRef idx="1">
+            <a:schemeClr val="accent1"/>
+          </a:lnRef>
+          <a:fillRef idx="3">
+            <a:schemeClr val="accent1"/>
+          </a:fillRef>
+          <a:effectRef idx="2">
+            <a:schemeClr val="accent1"/>
+          </a:effectRef>
+          <a:fontRef idx="minor">
+            <a:schemeClr val="lt1"/>
+          </a:fontRef>
+        </p:style>
+        <p:txBody>
+          <a:bodyPr rtlCol="0" anchor="ctr"/>
+          <a:lstStyle/>
+          <a:p>
+            <a:pPr algn="ctr"/>
+          </a:p>
+        </p:txBody>
+      </p:sp>
+      <p:sp>
+        <p:nvSpPr>
+          <p:cNvPr id="8" name="TextBox 7"/>
+          <p:cNvSpPr txBox="1"/>
+          <p:nvPr/>
+        </p:nvSpPr>
+        <p:spPr>
+          <a:xfrm>
+            <a:off x="640080" y="6455664"/>
+            <a:ext cx="8229600" cy="320040"/>
+          </a:xfrm>
+          <a:prstGeom prst="rect">
+            <a:avLst/>
+          </a:prstGeom>
+          <a:noFill/>
+        </p:spPr>
+        <p:txBody>
+          <a:bodyPr wrap="square">
+            <a:spAutoFit/>
+          </a:bodyPr>
+          <a:lstStyle/>
+          <a:p>
+            <a:pPr>
+              <a:spcAft>
+                <a:spcPts val="0"/>
+              </a:spcAft>
+            </a:pPr>
+            <a:r>
+              <a:rPr sz="900" b="0">
+                <a:solidFill>
+                  <a:srgbClr val="51636A"/>
+                </a:solidFill>
+                <a:latin typeface="Calibri"/>
+              </a:rPr>
+              <a:t>food-ppt demo · synthetic data</a:t>
+            </a:r>
+          </a:p>
+        </p:txBody>
+      </p:sp>
+      <p:sp>
+        <p:nvSpPr>
+          <p:cNvPr id="9" name="TextBox 8"/>
+          <p:cNvSpPr txBox="1"/>
+          <p:nvPr/>
+        </p:nvSpPr>
+        <p:spPr>
+          <a:xfrm>
+            <a:off x="10881360" y="6455664"/>
+            <a:ext cx="640080" cy="320040"/>
+          </a:xfrm>
+          <a:prstGeom prst="rect">
+            <a:avLst/>
+          </a:prstGeom>
+          <a:noFill/>
+        </p:spPr>
+        <p:txBody>
+          <a:bodyPr wrap="square">
+            <a:spAutoFit/>
+          </a:bodyPr>
+          <a:lstStyle/>
+          <a:p>
+            <a:pPr algn="r">
+              <a:spcAft>
+                <a:spcPts val="0"/>
+              </a:spcAft>
+            </a:pPr>
+            <a:r>
+              <a:rPr sz="900" b="0">
+                <a:solidFill>
+                  <a:srgbClr val="51636A"/>
+                </a:solidFill>
+                <a:latin typeface="Calibri"/>
+              </a:rPr>
+              <a:t>8</a:t>
+            </a:r>
+          </a:p>
+        </p:txBody>
+      </p:sp>
+    </p:spTree>
+  </p:cSld>
+  <p:clrMapOvr>
+    <a:masterClrMapping/>
+  </p:clrMapOvr>
+</p:sld>
+</file>
+
+<file path=ppt/slides/slide9.xml><?xml version="1.0" encoding="utf-8"?>
+<p:sld xmlns:a="http://schemas.openxmlformats.org/drawingml/2006/main" xmlns:p="http://schemas.openxmlformats.org/presentationml/2006/main" xmlns:r="http://schemas.openxmlformats.org/officeDocument/2006/relationships">
+  <p:cSld>
+    <p:spTree>
+      <p:nvGrpSpPr>
+        <p:cNvPr id="1" name=""/>
+        <p:cNvGrpSpPr/>
+        <p:nvPr/>
+      </p:nvGrpSpPr>
+      <p:grpSpPr/>
+      <p:sp>
+        <p:nvSpPr>
+          <p:cNvPr id="2" name="Rectangle 1"/>
+          <p:cNvSpPr/>
+          <p:nvPr/>
+        </p:nvSpPr>
+        <p:spPr>
+          <a:xfrm>
+            <a:off x="0" y="0"/>
+            <a:ext cx="12191695" cy="6858000"/>
+          </a:xfrm>
+          <a:prstGeom prst="rect">
+            <a:avLst/>
+          </a:prstGeom>
+          <a:solidFill>
+            <a:srgbClr val="155E63"/>
+          </a:solidFill>
+          <a:ln>
+            <a:noFill/>
+          </a:ln>
+          <a:effectLst/>
+        </p:spPr>
+        <p:style>
+          <a:lnRef idx="1">
+            <a:schemeClr val="accent1"/>
+          </a:lnRef>
+          <a:fillRef idx="3">
+            <a:schemeClr val="accent1"/>
+          </a:fillRef>
+          <a:effectRef idx="2">
+            <a:schemeClr val="accent1"/>
+          </a:effectRef>
+          <a:fontRef idx="minor">
+            <a:schemeClr val="lt1"/>
+          </a:fontRef>
+        </p:style>
+        <p:txBody>
+          <a:bodyPr rtlCol="0" anchor="ctr"/>
+          <a:lstStyle/>
+          <a:p>
+            <a:pPr algn="ctr"/>
+          </a:p>
+        </p:txBody>
+      </p:sp>
+      <p:sp>
+        <p:nvSpPr>
+          <p:cNvPr id="3" name="Rectangle 2"/>
+          <p:cNvSpPr/>
+          <p:nvPr/>
+        </p:nvSpPr>
+        <p:spPr>
+          <a:xfrm>
+            <a:off x="0" y="2697480"/>
+            <a:ext cx="502920" cy="1463040"/>
+          </a:xfrm>
+          <a:prstGeom prst="rect">
+            <a:avLst/>
+          </a:prstGeom>
+          <a:solidFill>
+            <a:srgbClr val="3FA7A0"/>
+          </a:solidFill>
+          <a:ln>
+            <a:noFill/>
+          </a:ln>
+          <a:effectLst/>
+        </p:spPr>
+        <p:style>
+          <a:lnRef idx="1">
+            <a:schemeClr val="accent1"/>
+          </a:lnRef>
+          <a:fillRef idx="3">
+            <a:schemeClr val="accent1"/>
+          </a:fillRef>
+          <a:effectRef idx="2">
+            <a:schemeClr val="accent1"/>
+          </a:effectRef>
+          <a:fontRef idx="minor">
+            <a:schemeClr val="lt1"/>
+          </a:fontRef>
+        </p:style>
+        <p:txBody>
+          <a:bodyPr rtlCol="0" anchor="ctr"/>
+          <a:lstStyle/>
+          <a:p>
+            <a:pPr algn="ctr"/>
+          </a:p>
+        </p:txBody>
+      </p:sp>
+      <p:sp>
+        <p:nvSpPr>
+          <p:cNvPr id="4" name="TextBox 3"/>
+          <p:cNvSpPr txBox="1"/>
+          <p:nvPr/>
+        </p:nvSpPr>
+        <p:spPr>
+          <a:xfrm>
+            <a:off x="822960" y="0"/>
+            <a:ext cx="10515600" cy="6858000"/>
+          </a:xfrm>
+          <a:prstGeom prst="rect">
+            <a:avLst/>
+          </a:prstGeom>
+          <a:noFill/>
+        </p:spPr>
+        <p:txBody>
+          <a:bodyPr wrap="square" anchor="ctr">
+            <a:spAutoFit/>
+          </a:bodyPr>
+          <a:lstStyle/>
+          <a:p>
+            <a:pPr>
+              <a:spcAft>
+                <a:spcPts val="600"/>
+              </a:spcAft>
+            </a:pPr>
+            <a:r>
+              <a:rPr sz="4000" b="1" spc="-50">
+                <a:solidFill>
+                  <a:srgbClr val="FFFFFF"/>
+                </a:solidFill>
+                <a:latin typeface="Calibri"/>
+              </a:rPr>
+              <a:t>AI-use disclosure</a:t>
+            </a:r>
+          </a:p>
+        </p:txBody>
+      </p:sp>
+      <p:sp>
+        <p:nvSpPr>
+          <p:cNvPr id="5" name="Rectangle 4"/>
+          <p:cNvSpPr/>
+          <p:nvPr/>
+        </p:nvSpPr>
+        <p:spPr>
+          <a:xfrm>
+            <a:off x="868680" y="4251960"/>
+            <a:ext cx="2377440" cy="44450"/>
+          </a:xfrm>
+          <a:prstGeom prst="rect">
+            <a:avLst/>
+          </a:prstGeom>
+          <a:solidFill>
+            <a:srgbClr val="3FA7A0"/>
+          </a:solidFill>
+          <a:ln>
+            <a:noFill/>
+          </a:ln>
+          <a:effectLst/>
+        </p:spPr>
+        <p:style>
+          <a:lnRef idx="1">
+            <a:schemeClr val="accent1"/>
+          </a:lnRef>
+          <a:fillRef idx="3">
+            <a:schemeClr val="accent1"/>
+          </a:fillRef>
+          <a:effectRef idx="2">
+            <a:schemeClr val="accent1"/>
+          </a:effectRef>
+          <a:fontRef idx="minor">
+            <a:schemeClr val="lt1"/>
+          </a:fontRef>
+        </p:style>
+        <p:txBody>
+          <a:bodyPr rtlCol="0" anchor="ctr"/>
+          <a:lstStyle/>
+          <a:p>
+            <a:pPr algn="ctr"/>
+          </a:p>
+        </p:txBody>
+      </p:sp>
+      <p:sp>
+        <p:nvSpPr>
+          <p:cNvPr id="6" name="TextBox 5"/>
           <p:cNvSpPr txBox="1"/>
           <p:nvPr/>
         </p:nvSpPr>
@@ -8125,7 +9574,7 @@
                 </a:solidFill>
                 <a:latin typeface="Calibri"/>
               </a:rPr>
-              <a:t>7</a:t>
+              <a:t>9</a:t>
             </a:r>
           </a:p>
         </p:txBody>
